--- a/examples/reference/pptx-default/kangzhe_integrity_default.pptx
+++ b/examples/reference/pptx-default/kangzhe_integrity_default.pptx
@@ -674,7 +674,7 @@
             <a:pPr/>
             <a:r>
               <a:rPr lang="zh-CN" dirty="0"/>
-              <a:t>今天用几分钟汇报一项研究资料包的完整性核对结果，材料是合成示例。先说结论：按计划应收二十四份资料，目前已收二十份，整体可用，但还有缺口需要补齐。</a:t>
+              <a:t>今天用几分钟汇报一个研究资料包的完整性核对，数据是合成的。按计划应收 24 份，目前收到 20 份，还缺 4 份。希望会上把补收和确认的安排定下来。</a:t>
             </a:r>
           </a:p>
         </p:txBody>
@@ -734,7 +734,7 @@
             <a:pPr/>
             <a:r>
               <a:rPr lang="zh-CN" dirty="0"/>
-              <a:t>汇报分三部分：先说明这次核对覆盖哪些人群、时间窗和资料组，再看各组的应收与已收情况，最后是补收、确认和复核的季度安排。</a:t>
+              <a:t>分三部分：这次核对的范围，各组资料收齐了多少，以及补收、确认和复核的季度安排。</a:t>
             </a:r>
           </a:p>
         </p:txBody>
@@ -794,7 +794,7 @@
             <a:pPr/>
             <a:r>
               <a:rPr lang="zh-CN" dirty="0"/>
-              <a:t>核对针对成人受试者，以第十六周作为评价时间窗。纳入的资料分四组：方案与修订、中心记录、实验室数据和安全性报告。方案有两个版本，V二点一和V二点三，我们把两版并排比较，发现两项差异需要确认，分别是筛选窗口和终点评价时间点。这两项会影响后面的组间比较，所以放在核对计划里单独处理。</a:t>
+              <a:t>核对对象是成人受试者，评价时间窗是第 16 周。资料分 4 组：方案与修订、中心记录、实验室数据、安全性报告。方案有 V2.1 和 V2.3 两版，并排比下来有 2 处要确认：筛选窗口和终点评价时间点。这 2 项会影响后面的组间比较，所以确认之前先不比。</a:t>
             </a:r>
           </a:p>
         </p:txBody>
@@ -854,7 +854,7 @@
             <a:pPr/>
             <a:r>
               <a:rPr lang="zh-CN" dirty="0"/>
-              <a:t>四组资料里，方案与修订、实验室数据已经收齐，缺口集中在中心记录和安全性报告。中心记录应收十二份，已收九份，缺三份；安全性报告应收四份，缺一份，合计缺四份。缺失的记录在数据里保留为空值，不按零处理，也不做插补，这样后续比较时缺口是可见的，不会被当成真实的零值。</a:t>
+              <a:t>方案与修订、实验室数据已经收齐，缺口在两组：中心记录缺 3 份，安全性报告缺 1 份。缺的记录在数据里留空，不按零处理，也不插补，这样后面比较时缺口一直看得见。</a:t>
             </a:r>
           </a:p>
         </p:txBody>
@@ -914,7 +914,7 @@
             <a:pPr/>
             <a:r>
               <a:rPr lang="zh-CN" dirty="0"/>
-              <a:t>接下来的安排按季度推进。缺失资料的补收由医学部负责，从二零二六年第四季度开始，二零二七年第一季度内完成；两版方案的差异确认也在第一季度内完成。完整性复核由数统负责，安全性报告核对由PV负责，都从第一季度开始、延续到第二季度。最后在第二季度由医学部形成审阅意见。</a:t>
+              <a:t>关键节点是 2027 年一季度。缺的 4 份由医学部从今年四季度开始补收，一季度内补齐；两版方案的差异也在一季度内确认。数统的完整性复核和 PV 的安全性报告核对从一季度做到二季度，二季度由医学部形成审阅意见。</a:t>
             </a:r>
           </a:p>
         </p:txBody>
@@ -974,7 +974,7 @@
             <a:pPr/>
             <a:r>
               <a:rPr lang="zh-CN" dirty="0"/>
-              <a:t>最后请大家确认两件事：四份缺失资料由医学部牵头，在二零二七年第一季度内补收；两项方案差异确认之后，再做组间比较。如果没有不同意见，我们就按这个时间表推进。</a:t>
+              <a:t>最后请大家确认两件事：一是缺的 4 份资料由医学部牵头，2027 年一季度内补收；二是 2 项版本差异确认之后，再做组间比较。没有不同意见的话，就按这个时间表推进。</a:t>
             </a:r>
           </a:p>
         </p:txBody>
@@ -1527,9 +1527,41 @@
           </a:prstGeom>
         </p:spPr>
       </p:pic>
+      <p:sp>
+        <p:nvSpPr>
+          <p:cNvPr id="3" name="hero-image-fade"/>
+          <p:cNvSpPr/>
+          <p:nvPr/>
+        </p:nvSpPr>
+        <p:spPr>
+          <a:xfrm>
+            <a:off x="0" y="381000"/>
+            <a:ext cx="12192000" cy="685800"/>
+          </a:xfrm>
+          <a:prstGeom prst="rect">
+            <a:avLst/>
+          </a:prstGeom>
+          <a:gradFill>
+            <a:gsLst>
+              <a:gs pos="0">
+                <a:schemeClr val="lt1"/>
+              </a:gs>
+              <a:gs pos="100000">
+                <a:schemeClr val="lt1">
+                  <a:alpha val="0"/>
+                </a:schemeClr>
+              </a:gs>
+            </a:gsLst>
+            <a:lin ang="5400000" scaled="1"/>
+          </a:gradFill>
+          <a:ln>
+            <a:noFill/>
+          </a:ln>
+        </p:spPr>
+      </p:sp>
       <p:pic>
         <p:nvPicPr>
-          <p:cNvPr id="3" name="logo"/>
+          <p:cNvPr id="4" name="logo"/>
           <p:cNvPicPr>
             <a:picLocks noChangeAspect="1"/>
           </p:cNvPicPr>
@@ -1553,21 +1585,21 @@
       </p:pic>
       <p:grpSp>
         <p:nvGrpSpPr>
-          <p:cNvPr id="5" name="cover-title"/>
+          <p:cNvPr id="6" name="cover-title"/>
           <p:cNvGrpSpPr/>
           <p:nvPr/>
         </p:nvGrpSpPr>
         <p:grpSpPr>
           <a:xfrm>
-            <a:off x="857250" y="1534160"/>
+            <a:off x="857250" y="2277110"/>
             <a:ext cx="5126736" cy="819150"/>
-            <a:chOff x="857250" y="1534160"/>
+            <a:chOff x="857250" y="2277110"/>
             <a:chExt cx="5126736" cy="819150"/>
           </a:xfrm>
         </p:grpSpPr>
         <p:sp>
           <p:nvSpPr>
-            <p:cNvPr id="4" name="TextBox 4"/>
+            <p:cNvPr id="5" name="TextBox 5"/>
             <p:cNvSpPr txBox="1"/>
             <p:nvPr/>
           </p:nvSpPr>
@@ -1585,7 +1617,7 @@
             </a:ln>
           </p:spPr>
           <p:txBody>
-            <a:bodyPr wrap="square" lIns="0" tIns="0" rIns="0" bIns="0" anchor="t" anchorCtr="0">
+            <a:bodyPr wrap="square" lIns="0" tIns="0" rIns="0" bIns="0" anchor="b" anchorCtr="0">
               <a:noAutofit/>
             </a:bodyPr>
             <a:lstStyle/>
@@ -1618,7 +1650,7 @@
       </p:grpSp>
       <p:grpSp>
         <p:nvGrpSpPr>
-          <p:cNvPr id="7" name="cover-subtitle"/>
+          <p:cNvPr id="8" name="cover-subtitle"/>
           <p:cNvGrpSpPr/>
           <p:nvPr/>
         </p:nvGrpSpPr>
@@ -1632,7 +1664,7 @@
         </p:grpSpPr>
         <p:sp>
           <p:nvSpPr>
-            <p:cNvPr id="6" name="TextBox 6"/>
+            <p:cNvPr id="7" name="TextBox 7"/>
             <p:cNvSpPr txBox="1"/>
             <p:nvPr/>
           </p:nvSpPr>
@@ -1683,7 +1715,7 @@
       </p:grpSp>
       <p:grpSp>
         <p:nvGrpSpPr>
-          <p:cNvPr id="9" name="cover-meta"/>
+          <p:cNvPr id="10" name="cover-meta"/>
           <p:cNvGrpSpPr/>
           <p:nvPr/>
         </p:nvGrpSpPr>
@@ -1697,7 +1729,7 @@
         </p:grpSpPr>
         <p:sp>
           <p:nvSpPr>
-            <p:cNvPr id="8" name="TextBox 8"/>
+            <p:cNvPr id="9" name="TextBox 9"/>
             <p:cNvSpPr txBox="1"/>
             <p:nvPr/>
           </p:nvSpPr>
@@ -1754,6 +1786,180 @@
   <p:transition ns3:dur="400">
     <p:fade/>
   </p:transition>
+  <p:timing>
+    <p:tnLst>
+      <p:par>
+        <p:cTn id="1" dur="indefinite" restart="never" nodeType="tmRoot">
+          <p:childTnLst>
+            <p:seq concurrent="1" nextAc="seek">
+              <p:cTn id="2" dur="indefinite" nodeType="mainSeq">
+                <p:childTnLst>
+                  <p:par>
+                    <p:cTn id="3" fill="hold">
+                      <p:stCondLst>
+                        <p:cond delay="indefinite"/>
+                        <p:cond evt="onBegin" delay="0">
+                          <p:tn val="2"/>
+                        </p:cond>
+                      </p:stCondLst>
+                      <p:childTnLst>
+                        <p:par>
+                          <p:cTn id="4" fill="hold">
+                            <p:stCondLst>
+                              <p:cond delay="0"/>
+                            </p:stCondLst>
+                            <p:childTnLst>
+                              <p:par>
+                                <p:cTn id="5" presetID="10" presetClass="entr" presetSubtype="0" fill="hold" grpId="0" nodeType="withEffect" decel="70000">
+                                  <p:stCondLst>
+                                    <p:cond delay="0"/>
+                                  </p:stCondLst>
+                                  <p:childTnLst>
+                                    <p:set>
+                                      <p:cBhvr>
+                                        <p:cTn id="6" dur="1" fill="hold">
+                                          <p:stCondLst>
+                                            <p:cond delay="0"/>
+                                          </p:stCondLst>
+                                        </p:cTn>
+                                        <p:tgtEl>
+                                          <p:spTgt spid="6"/>
+                                        </p:tgtEl>
+                                        <p:attrNameLst>
+                                          <p:attrName>style.visibility</p:attrName>
+                                        </p:attrNameLst>
+                                      </p:cBhvr>
+                                      <p:to>
+                                        <p:strVal val="visible"/>
+                                      </p:to>
+                                    </p:set>
+                                    <p:animEffect transition="in" filter="fade">
+                                      <p:cBhvr>
+                                        <p:cTn id="7" dur="520"/>
+                                        <p:tgtEl>
+                                          <p:spTgt spid="6"/>
+                                        </p:tgtEl>
+                                      </p:cBhvr>
+                                    </p:animEffect>
+                                  </p:childTnLst>
+                                </p:cTn>
+                              </p:par>
+                            </p:childTnLst>
+                          </p:cTn>
+                        </p:par>
+                        <p:par>
+                          <p:cTn id="8" fill="hold">
+                            <p:stCondLst>
+                              <p:cond delay="0"/>
+                            </p:stCondLst>
+                            <p:childTnLst>
+                              <p:par>
+                                <p:cTn id="9" presetID="10" presetClass="entr" presetSubtype="0" fill="hold" grpId="0" nodeType="withEffect" decel="70000">
+                                  <p:stCondLst>
+                                    <p:cond delay="70"/>
+                                  </p:stCondLst>
+                                  <p:childTnLst>
+                                    <p:set>
+                                      <p:cBhvr>
+                                        <p:cTn id="10" dur="1" fill="hold">
+                                          <p:stCondLst>
+                                            <p:cond delay="0"/>
+                                          </p:stCondLst>
+                                        </p:cTn>
+                                        <p:tgtEl>
+                                          <p:spTgt spid="8"/>
+                                        </p:tgtEl>
+                                        <p:attrNameLst>
+                                          <p:attrName>style.visibility</p:attrName>
+                                        </p:attrNameLst>
+                                      </p:cBhvr>
+                                      <p:to>
+                                        <p:strVal val="visible"/>
+                                      </p:to>
+                                    </p:set>
+                                    <p:animEffect transition="in" filter="fade">
+                                      <p:cBhvr>
+                                        <p:cTn id="11" dur="520"/>
+                                        <p:tgtEl>
+                                          <p:spTgt spid="8"/>
+                                        </p:tgtEl>
+                                      </p:cBhvr>
+                                    </p:animEffect>
+                                  </p:childTnLst>
+                                </p:cTn>
+                              </p:par>
+                            </p:childTnLst>
+                          </p:cTn>
+                        </p:par>
+                        <p:par>
+                          <p:cTn id="12" fill="hold">
+                            <p:stCondLst>
+                              <p:cond delay="70"/>
+                            </p:stCondLst>
+                            <p:childTnLst>
+                              <p:par>
+                                <p:cTn id="13" presetID="10" presetClass="entr" presetSubtype="0" fill="hold" grpId="0" nodeType="withEffect" decel="70000">
+                                  <p:stCondLst>
+                                    <p:cond delay="140"/>
+                                  </p:stCondLst>
+                                  <p:childTnLst>
+                                    <p:set>
+                                      <p:cBhvr>
+                                        <p:cTn id="14" dur="1" fill="hold">
+                                          <p:stCondLst>
+                                            <p:cond delay="0"/>
+                                          </p:stCondLst>
+                                        </p:cTn>
+                                        <p:tgtEl>
+                                          <p:spTgt spid="10"/>
+                                        </p:tgtEl>
+                                        <p:attrNameLst>
+                                          <p:attrName>style.visibility</p:attrName>
+                                        </p:attrNameLst>
+                                      </p:cBhvr>
+                                      <p:to>
+                                        <p:strVal val="visible"/>
+                                      </p:to>
+                                    </p:set>
+                                    <p:animEffect transition="in" filter="fade">
+                                      <p:cBhvr>
+                                        <p:cTn id="15" dur="520"/>
+                                        <p:tgtEl>
+                                          <p:spTgt spid="10"/>
+                                        </p:tgtEl>
+                                      </p:cBhvr>
+                                    </p:animEffect>
+                                  </p:childTnLst>
+                                </p:cTn>
+                              </p:par>
+                            </p:childTnLst>
+                          </p:cTn>
+                        </p:par>
+                      </p:childTnLst>
+                    </p:cTn>
+                  </p:par>
+                </p:childTnLst>
+              </p:cTn>
+              <p:prevCondLst>
+                <p:cond evt="onPrev" delay="0">
+                  <p:tgtEl>
+                    <p:sldTgt/>
+                  </p:tgtEl>
+                </p:cond>
+              </p:prevCondLst>
+              <p:nextCondLst>
+                <p:cond evt="onNext" delay="0">
+                  <p:tgtEl>
+                    <p:sldTgt/>
+                  </p:tgtEl>
+                </p:cond>
+              </p:nextCondLst>
+            </p:seq>
+          </p:childTnLst>
+        </p:cTn>
+      </p:par>
+    </p:tnLst>
+  </p:timing>
 </p:sld>
 </file>
 
@@ -1807,9 +2013,41 @@
           </a:prstGeom>
         </p:spPr>
       </p:pic>
+      <p:sp>
+        <p:nvSpPr>
+          <p:cNvPr id="3" name="hero-image-fade"/>
+          <p:cNvSpPr/>
+          <p:nvPr/>
+        </p:nvSpPr>
+        <p:spPr>
+          <a:xfrm>
+            <a:off x="0" y="857250"/>
+            <a:ext cx="12192000" cy="685800"/>
+          </a:xfrm>
+          <a:prstGeom prst="rect">
+            <a:avLst/>
+          </a:prstGeom>
+          <a:gradFill>
+            <a:gsLst>
+              <a:gs pos="0">
+                <a:schemeClr val="lt1"/>
+              </a:gs>
+              <a:gs pos="100000">
+                <a:schemeClr val="lt1">
+                  <a:alpha val="0"/>
+                </a:schemeClr>
+              </a:gs>
+            </a:gsLst>
+            <a:lin ang="5400000" scaled="1"/>
+          </a:gradFill>
+          <a:ln>
+            <a:noFill/>
+          </a:ln>
+        </p:spPr>
+      </p:sp>
       <p:pic>
         <p:nvPicPr>
-          <p:cNvPr id="3" name="logo"/>
+          <p:cNvPr id="4" name="logo"/>
           <p:cNvPicPr>
             <a:picLocks noChangeAspect="1"/>
           </p:cNvPicPr>
@@ -1833,7 +2071,7 @@
       </p:pic>
       <p:grpSp>
         <p:nvGrpSpPr>
-          <p:cNvPr id="5" name="toc-title"/>
+          <p:cNvPr id="6" name="toc-title"/>
           <p:cNvGrpSpPr/>
           <p:nvPr/>
         </p:nvGrpSpPr>
@@ -1847,7 +2085,7 @@
         </p:grpSpPr>
         <p:sp>
           <p:nvSpPr>
-            <p:cNvPr id="4" name="TextBox 4"/>
+            <p:cNvPr id="5" name="TextBox 5"/>
             <p:cNvSpPr txBox="1"/>
             <p:nvPr/>
           </p:nvSpPr>
@@ -1898,7 +2136,7 @@
       </p:grpSp>
       <p:grpSp>
         <p:nvGrpSpPr>
-          <p:cNvPr id="11" name="toc-card-1"/>
+          <p:cNvPr id="12" name="toc-card-1"/>
           <p:cNvGrpSpPr/>
           <p:nvPr/>
         </p:nvGrpSpPr>
@@ -1912,7 +2150,7 @@
         </p:grpSpPr>
         <p:sp>
           <p:nvSpPr>
-            <p:cNvPr id="6" name="Rectangle 6"/>
+            <p:cNvPr id="7" name="Rectangle 7"/>
             <p:cNvSpPr/>
             <p:nvPr/>
           </p:nvSpPr>
@@ -1964,7 +2202,7 @@
         </p:sp>
         <p:sp>
           <p:nvSpPr>
-            <p:cNvPr id="7" name="Freeform 7"/>
+            <p:cNvPr id="8" name="Freeform 8"/>
             <p:cNvSpPr/>
             <p:nvPr/>
           </p:nvSpPr>
@@ -2004,7 +2242,7 @@
         </p:sp>
         <p:sp>
           <p:nvSpPr>
-            <p:cNvPr id="8" name="TextBox 8"/>
+            <p:cNvPr id="9" name="TextBox 9"/>
             <p:cNvSpPr txBox="1"/>
             <p:nvPr/>
           </p:nvSpPr>
@@ -2054,7 +2292,7 @@
         </p:sp>
         <p:sp>
           <p:nvSpPr>
-            <p:cNvPr id="9" name="TextBox 9"/>
+            <p:cNvPr id="10" name="TextBox 10"/>
             <p:cNvSpPr txBox="1"/>
             <p:nvPr/>
           </p:nvSpPr>
@@ -2104,7 +2342,7 @@
         </p:sp>
         <p:sp>
           <p:nvSpPr>
-            <p:cNvPr id="10" name="TextBox 10"/>
+            <p:cNvPr id="11" name="TextBox 11"/>
             <p:cNvSpPr txBox="1"/>
             <p:nvPr/>
           </p:nvSpPr>
@@ -2155,7 +2393,7 @@
       </p:grpSp>
       <p:grpSp>
         <p:nvGrpSpPr>
-          <p:cNvPr id="17" name="toc-card-2"/>
+          <p:cNvPr id="18" name="toc-card-2"/>
           <p:cNvGrpSpPr/>
           <p:nvPr/>
         </p:nvGrpSpPr>
@@ -2169,7 +2407,7 @@
         </p:grpSpPr>
         <p:sp>
           <p:nvSpPr>
-            <p:cNvPr id="12" name="Rectangle 12"/>
+            <p:cNvPr id="13" name="Rectangle 13"/>
             <p:cNvSpPr/>
             <p:nvPr/>
           </p:nvSpPr>
@@ -2221,7 +2459,7 @@
         </p:sp>
         <p:sp>
           <p:nvSpPr>
-            <p:cNvPr id="13" name="Freeform 13"/>
+            <p:cNvPr id="14" name="Freeform 14"/>
             <p:cNvSpPr/>
             <p:nvPr/>
           </p:nvSpPr>
@@ -2261,7 +2499,7 @@
         </p:sp>
         <p:sp>
           <p:nvSpPr>
-            <p:cNvPr id="14" name="TextBox 14"/>
+            <p:cNvPr id="15" name="TextBox 15"/>
             <p:cNvSpPr txBox="1"/>
             <p:nvPr/>
           </p:nvSpPr>
@@ -2311,7 +2549,7 @@
         </p:sp>
         <p:sp>
           <p:nvSpPr>
-            <p:cNvPr id="15" name="TextBox 15"/>
+            <p:cNvPr id="16" name="TextBox 16"/>
             <p:cNvSpPr txBox="1"/>
             <p:nvPr/>
           </p:nvSpPr>
@@ -2361,7 +2599,7 @@
         </p:sp>
         <p:sp>
           <p:nvSpPr>
-            <p:cNvPr id="16" name="TextBox 16"/>
+            <p:cNvPr id="17" name="TextBox 17"/>
             <p:cNvSpPr txBox="1"/>
             <p:nvPr/>
           </p:nvSpPr>
@@ -2412,7 +2650,7 @@
       </p:grpSp>
       <p:grpSp>
         <p:nvGrpSpPr>
-          <p:cNvPr id="23" name="toc-card-3"/>
+          <p:cNvPr id="24" name="toc-card-3"/>
           <p:cNvGrpSpPr/>
           <p:nvPr/>
         </p:nvGrpSpPr>
@@ -2426,7 +2664,7 @@
         </p:grpSpPr>
         <p:sp>
           <p:nvSpPr>
-            <p:cNvPr id="18" name="Rectangle 18"/>
+            <p:cNvPr id="19" name="Rectangle 19"/>
             <p:cNvSpPr/>
             <p:nvPr/>
           </p:nvSpPr>
@@ -2478,7 +2716,7 @@
         </p:sp>
         <p:sp>
           <p:nvSpPr>
-            <p:cNvPr id="19" name="Freeform 19"/>
+            <p:cNvPr id="20" name="Freeform 20"/>
             <p:cNvSpPr/>
             <p:nvPr/>
           </p:nvSpPr>
@@ -2518,7 +2756,7 @@
         </p:sp>
         <p:sp>
           <p:nvSpPr>
-            <p:cNvPr id="20" name="TextBox 20"/>
+            <p:cNvPr id="21" name="TextBox 21"/>
             <p:cNvSpPr txBox="1"/>
             <p:nvPr/>
           </p:nvSpPr>
@@ -2568,7 +2806,7 @@
         </p:sp>
         <p:sp>
           <p:nvSpPr>
-            <p:cNvPr id="21" name="TextBox 21"/>
+            <p:cNvPr id="22" name="TextBox 22"/>
             <p:cNvSpPr txBox="1"/>
             <p:nvPr/>
           </p:nvSpPr>
@@ -2618,7 +2856,7 @@
         </p:sp>
         <p:sp>
           <p:nvSpPr>
-            <p:cNvPr id="22" name="TextBox 22"/>
+            <p:cNvPr id="23" name="TextBox 23"/>
             <p:cNvSpPr txBox="1"/>
             <p:nvPr/>
           </p:nvSpPr>
@@ -2712,7 +2950,7 @@
                                           </p:stCondLst>
                                         </p:cTn>
                                         <p:tgtEl>
-                                          <p:spTgt spid="11"/>
+                                          <p:spTgt spid="12"/>
                                         </p:tgtEl>
                                         <p:attrNameLst>
                                           <p:attrName>style.visibility</p:attrName>
@@ -2726,7 +2964,7 @@
                                       <p:cBhvr>
                                         <p:cTn id="7" dur="520"/>
                                         <p:tgtEl>
-                                          <p:spTgt spid="11"/>
+                                          <p:spTgt spid="12"/>
                                         </p:tgtEl>
                                       </p:cBhvr>
                                     </p:animEffect>
@@ -2756,7 +2994,7 @@
                                           </p:stCondLst>
                                         </p:cTn>
                                         <p:tgtEl>
-                                          <p:spTgt spid="17"/>
+                                          <p:spTgt spid="18"/>
                                         </p:tgtEl>
                                         <p:attrNameLst>
                                           <p:attrName>style.visibility</p:attrName>
@@ -2770,7 +3008,7 @@
                                       <p:cBhvr>
                                         <p:cTn id="11" dur="520"/>
                                         <p:tgtEl>
-                                          <p:spTgt spid="17"/>
+                                          <p:spTgt spid="18"/>
                                         </p:tgtEl>
                                       </p:cBhvr>
                                     </p:animEffect>
@@ -2800,7 +3038,7 @@
                                           </p:stCondLst>
                                         </p:cTn>
                                         <p:tgtEl>
-                                          <p:spTgt spid="23"/>
+                                          <p:spTgt spid="24"/>
                                         </p:tgtEl>
                                         <p:attrNameLst>
                                           <p:attrName>style.visibility</p:attrName>
@@ -2814,7 +3052,7 @@
                                       <p:cBhvr>
                                         <p:cTn id="15" dur="520"/>
                                         <p:tgtEl>
-                                          <p:spTgt spid="23"/>
+                                          <p:spTgt spid="24"/>
                                         </p:tgtEl>
                                       </p:cBhvr>
                                     </p:animEffect>
@@ -2910,7 +3148,7 @@
         </p:grpSpPr>
         <p:sp xmlns:p="http://schemas.openxmlformats.org/presentationml/2006/main" xmlns:a="http://schemas.openxmlformats.org/drawingml/2006/main">
           <p:nvSpPr>
-            <p:cNvPr id="51" name="kz-facet-o"/>
+            <p:cNvPr id="55" name="kz-facet-o"/>
             <p:cNvSpPr/>
             <p:nvPr/>
           </p:nvSpPr>
@@ -2978,7 +3216,7 @@
         </p:sp>
         <p:sp xmlns:p="http://schemas.openxmlformats.org/presentationml/2006/main" xmlns:a="http://schemas.openxmlformats.org/drawingml/2006/main">
           <p:nvSpPr>
-            <p:cNvPr id="52" name="kz-facet-y"/>
+            <p:cNvPr id="56" name="kz-facet-y"/>
             <p:cNvSpPr/>
             <p:nvPr/>
           </p:nvSpPr>
@@ -3046,7 +3284,7 @@
         </p:sp>
         <p:sp xmlns:p="http://schemas.openxmlformats.org/presentationml/2006/main" xmlns:a="http://schemas.openxmlformats.org/drawingml/2006/main">
           <p:nvSpPr>
-            <p:cNvPr id="53" name="kz-facet-o-candy"/>
+            <p:cNvPr id="57" name="kz-facet-o-candy"/>
             <p:cNvSpPr/>
             <p:nvPr/>
           </p:nvSpPr>
@@ -3142,7 +3380,7 @@
         </p:sp>
         <p:sp xmlns:p="http://schemas.openxmlformats.org/presentationml/2006/main" xmlns:a="http://schemas.openxmlformats.org/drawingml/2006/main">
           <p:nvSpPr>
-            <p:cNvPr id="54" name="kz-facet-y-candy"/>
+            <p:cNvPr id="58" name="kz-facet-y-candy"/>
             <p:cNvSpPr/>
             <p:nvPr/>
           </p:nvSpPr>
@@ -3360,10 +3598,10 @@
         </p:nvGrpSpPr>
         <p:grpSpPr>
           <a:xfrm>
-            <a:off x="533400" y="2314575"/>
-            <a:ext cx="3555968" cy="2571750"/>
-            <a:chOff x="533400" y="2314575"/>
-            <a:chExt cx="3555968" cy="2571750"/>
+            <a:off x="533400" y="1628775"/>
+            <a:ext cx="3555968" cy="2914650"/>
+            <a:chOff x="533400" y="1628775"/>
+            <a:chExt cx="3555968" cy="2914650"/>
           </a:xfrm>
         </p:grpSpPr>
         <p:sp>
@@ -3374,12 +3612,12 @@
           </p:nvSpPr>
           <p:spPr>
             <a:xfrm>
-              <a:off x="533400" y="2314575"/>
-              <a:ext cx="3555968" cy="2571750"/>
+              <a:off x="533400" y="1628775"/>
+              <a:ext cx="3555968" cy="2914650"/>
             </a:xfrm>
             <a:prstGeom prst="roundRect">
               <a:avLst>
-                <a:gd name="adj" fmla="val 8889"/>
+                <a:gd name="adj" fmla="val 7843"/>
               </a:avLst>
             </a:prstGeom>
             <a:gradFill>
@@ -3426,7 +3664,7 @@
           </p:nvSpPr>
           <p:spPr>
             <a:xfrm>
-              <a:off x="762000" y="2324100"/>
+              <a:off x="762000" y="1638300"/>
               <a:ext cx="1066800" cy="14288"/>
             </a:xfrm>
             <a:prstGeom prst="rect">
@@ -3465,7 +3703,7 @@
           </p:nvSpPr>
           <p:spPr>
             <a:xfrm>
-              <a:off x="752856" y="2555875"/>
+              <a:off x="752856" y="1870075"/>
               <a:ext cx="1956816" cy="352044"/>
             </a:xfrm>
             <a:prstGeom prst="rect">
@@ -3492,7 +3730,7 @@
                   <a:ea typeface="+mn-ea"/>
                   <a:cs typeface="+mn-cs"/>
                 </a:rPr>
-                <a:t>研究人群与时间窗</a:t>
+                <a:t>研究对象与时间窗</a:t>
               </a:r>
             </a:p>
           </p:txBody>
@@ -3505,12 +3743,12 @@
           </p:nvSpPr>
           <p:spPr>
             <a:xfrm>
-              <a:off x="762000" y="2981325"/>
-              <a:ext cx="3098768" cy="762000"/>
+              <a:off x="762000" y="2314575"/>
+              <a:ext cx="3098768" cy="914400"/>
             </a:xfrm>
             <a:prstGeom prst="roundRect">
               <a:avLst>
-                <a:gd name="adj" fmla="val 17500"/>
+                <a:gd name="adj" fmla="val 14583"/>
               </a:avLst>
             </a:prstGeom>
             <a:gradFill>
@@ -3545,7 +3783,7 @@
           </p:nvSpPr>
           <p:spPr>
             <a:xfrm>
-              <a:off x="908304" y="3114675"/>
+              <a:off x="908304" y="2524125"/>
               <a:ext cx="658368" cy="234696"/>
             </a:xfrm>
             <a:prstGeom prst="rect">
@@ -3585,7 +3823,7 @@
           </p:nvSpPr>
           <p:spPr>
             <a:xfrm>
-              <a:off x="906780" y="3394075"/>
+              <a:off x="906780" y="2841625"/>
               <a:ext cx="1024890" cy="293370"/>
             </a:xfrm>
             <a:prstGeom prst="rect">
@@ -3625,12 +3863,12 @@
           </p:nvSpPr>
           <p:spPr>
             <a:xfrm>
-              <a:off x="762000" y="3857625"/>
-              <a:ext cx="3098768" cy="762000"/>
+              <a:off x="762000" y="3381375"/>
+              <a:ext cx="3098768" cy="914400"/>
             </a:xfrm>
             <a:prstGeom prst="roundRect">
               <a:avLst>
-                <a:gd name="adj" fmla="val 17500"/>
+                <a:gd name="adj" fmla="val 14583"/>
               </a:avLst>
             </a:prstGeom>
             <a:gradFill>
@@ -3665,7 +3903,7 @@
           </p:nvSpPr>
           <p:spPr>
             <a:xfrm>
-              <a:off x="908304" y="3990975"/>
+              <a:off x="908304" y="3590925"/>
               <a:ext cx="819912" cy="234696"/>
             </a:xfrm>
             <a:prstGeom prst="rect">
@@ -3705,7 +3943,7 @@
           </p:nvSpPr>
           <p:spPr>
             <a:xfrm>
-              <a:off x="906780" y="4270375"/>
+              <a:off x="906780" y="3908425"/>
               <a:ext cx="779545" cy="293370"/>
             </a:xfrm>
             <a:prstGeom prst="rect">
@@ -3746,10 +3984,10 @@
         </p:nvGrpSpPr>
         <p:grpSpPr>
           <a:xfrm>
-            <a:off x="4317968" y="2314575"/>
-            <a:ext cx="3555968" cy="2571750"/>
-            <a:chOff x="4317968" y="2314575"/>
-            <a:chExt cx="3555968" cy="2571750"/>
+            <a:off x="4317968" y="1628775"/>
+            <a:ext cx="3555968" cy="2914650"/>
+            <a:chOff x="4317968" y="1628775"/>
+            <a:chExt cx="3555968" cy="2914650"/>
           </a:xfrm>
         </p:grpSpPr>
         <p:sp>
@@ -3760,12 +3998,12 @@
           </p:nvSpPr>
           <p:spPr>
             <a:xfrm>
-              <a:off x="4317968" y="2314575"/>
-              <a:ext cx="3555968" cy="2571750"/>
+              <a:off x="4317968" y="1628775"/>
+              <a:ext cx="3555968" cy="2914650"/>
             </a:xfrm>
             <a:prstGeom prst="roundRect">
               <a:avLst>
-                <a:gd name="adj" fmla="val 8889"/>
+                <a:gd name="adj" fmla="val 7843"/>
               </a:avLst>
             </a:prstGeom>
             <a:gradFill>
@@ -3812,7 +4050,7 @@
           </p:nvSpPr>
           <p:spPr>
             <a:xfrm>
-              <a:off x="4546568" y="2324100"/>
+              <a:off x="4546568" y="1638300"/>
               <a:ext cx="1066800" cy="14288"/>
             </a:xfrm>
             <a:prstGeom prst="rect">
@@ -3851,7 +4089,7 @@
           </p:nvSpPr>
           <p:spPr>
             <a:xfrm>
-              <a:off x="4537424" y="2555875"/>
+              <a:off x="4537424" y="1870075"/>
               <a:ext cx="987552" cy="352044"/>
             </a:xfrm>
             <a:prstGeom prst="rect">
@@ -3891,8 +4129,8 @@
           </p:nvSpPr>
           <p:spPr>
             <a:xfrm>
-              <a:off x="7154704" y="2619375"/>
-              <a:ext cx="496824" cy="234696"/>
+              <a:off x="7130472" y="1933575"/>
+              <a:ext cx="521056" cy="234696"/>
             </a:xfrm>
             <a:prstGeom prst="rect">
               <a:avLst/>
@@ -3918,7 +4156,7 @@
                   <a:ea typeface="+mn-ea"/>
                   <a:cs typeface="+mn-cs"/>
                 </a:rPr>
-                <a:t>共四组</a:t>
+                <a:t>共 4 组</a:t>
               </a:r>
             </a:p>
           </p:txBody>
@@ -3931,10 +4169,10 @@
           </p:nvGrpSpPr>
           <p:grpSpPr>
             <a:xfrm>
-              <a:off x="4546568" y="2981325"/>
-              <a:ext cx="3098864" cy="1638300"/>
-              <a:chOff x="4546568" y="2981325"/>
-              <a:chExt cx="3098864" cy="1638300"/>
+              <a:off x="4546568" y="2314575"/>
+              <a:ext cx="3098864" cy="1981200"/>
+              <a:chOff x="4546568" y="2314575"/>
+              <a:chExt cx="3098864" cy="1981200"/>
             </a:xfrm>
           </p:grpSpPr>
           <p:sp>
@@ -3945,12 +4183,12 @@
             </p:nvSpPr>
             <p:spPr>
               <a:xfrm>
-                <a:off x="4546568" y="2981325"/>
-                <a:ext cx="1492282" cy="762000"/>
+                <a:off x="4546568" y="2314575"/>
+                <a:ext cx="1492282" cy="914400"/>
               </a:xfrm>
               <a:prstGeom prst="roundRect">
                 <a:avLst>
-                  <a:gd name="adj" fmla="val 17500"/>
+                  <a:gd name="adj" fmla="val 14583"/>
                 </a:avLst>
               </a:prstGeom>
               <a:gradFill>
@@ -3985,7 +4223,7 @@
             </p:nvSpPr>
             <p:spPr>
               <a:xfrm>
-                <a:off x="4780312" y="3251200"/>
+                <a:off x="4780216" y="2660650"/>
                 <a:ext cx="1024890" cy="293370"/>
               </a:xfrm>
               <a:prstGeom prst="rect">
@@ -4025,12 +4263,12 @@
             </p:nvSpPr>
             <p:spPr>
               <a:xfrm>
-                <a:off x="6153150" y="2981325"/>
-                <a:ext cx="1492282" cy="762000"/>
+                <a:off x="6153150" y="2314575"/>
+                <a:ext cx="1492282" cy="914400"/>
               </a:xfrm>
               <a:prstGeom prst="roundRect">
                 <a:avLst>
-                  <a:gd name="adj" fmla="val 17500"/>
+                  <a:gd name="adj" fmla="val 14583"/>
                 </a:avLst>
               </a:prstGeom>
               <a:gradFill>
@@ -4065,7 +4303,7 @@
             </p:nvSpPr>
             <p:spPr>
               <a:xfrm>
-                <a:off x="6487763" y="3251200"/>
+                <a:off x="6487763" y="2660650"/>
                 <a:ext cx="822960" cy="293370"/>
               </a:xfrm>
               <a:prstGeom prst="rect">
@@ -4105,12 +4343,12 @@
             </p:nvSpPr>
             <p:spPr>
               <a:xfrm>
-                <a:off x="4546568" y="3857625"/>
-                <a:ext cx="1492282" cy="762000"/>
+                <a:off x="4546568" y="3381375"/>
+                <a:ext cx="1492282" cy="914400"/>
               </a:xfrm>
               <a:prstGeom prst="roundRect">
                 <a:avLst>
-                  <a:gd name="adj" fmla="val 17500"/>
+                  <a:gd name="adj" fmla="val 14583"/>
                 </a:avLst>
               </a:prstGeom>
               <a:gradFill>
@@ -4145,7 +4383,7 @@
             </p:nvSpPr>
             <p:spPr>
               <a:xfrm>
-                <a:off x="4780312" y="4127500"/>
+                <a:off x="4780216" y="3727450"/>
                 <a:ext cx="1024890" cy="293370"/>
               </a:xfrm>
               <a:prstGeom prst="rect">
@@ -4185,12 +4423,12 @@
             </p:nvSpPr>
             <p:spPr>
               <a:xfrm>
-                <a:off x="6153150" y="3857625"/>
-                <a:ext cx="1492282" cy="762000"/>
+                <a:off x="6153150" y="3381375"/>
+                <a:ext cx="1492282" cy="914400"/>
               </a:xfrm>
               <a:prstGeom prst="roundRect">
                 <a:avLst>
-                  <a:gd name="adj" fmla="val 17500"/>
+                  <a:gd name="adj" fmla="val 14583"/>
                 </a:avLst>
               </a:prstGeom>
               <a:gradFill>
@@ -4225,7 +4463,7 @@
             </p:nvSpPr>
             <p:spPr>
               <a:xfrm>
-                <a:off x="6386798" y="4127500"/>
+                <a:off x="6386798" y="3727450"/>
                 <a:ext cx="1024890" cy="293370"/>
               </a:xfrm>
               <a:prstGeom prst="rect">
@@ -4267,10 +4505,10 @@
         </p:nvGrpSpPr>
         <p:grpSpPr>
           <a:xfrm>
-            <a:off x="8102632" y="2314575"/>
-            <a:ext cx="3555968" cy="2571750"/>
-            <a:chOff x="8102632" y="2314575"/>
-            <a:chExt cx="3555968" cy="2571750"/>
+            <a:off x="8102632" y="1628775"/>
+            <a:ext cx="3555968" cy="2914650"/>
+            <a:chOff x="8102632" y="1628775"/>
+            <a:chExt cx="3555968" cy="2914650"/>
           </a:xfrm>
         </p:grpSpPr>
         <p:sp>
@@ -4281,12 +4519,12 @@
           </p:nvSpPr>
           <p:spPr>
             <a:xfrm>
-              <a:off x="8102632" y="2314575"/>
-              <a:ext cx="3555968" cy="2571750"/>
+              <a:off x="8102632" y="1628775"/>
+              <a:ext cx="3555968" cy="2914650"/>
             </a:xfrm>
             <a:prstGeom prst="roundRect">
               <a:avLst>
-                <a:gd name="adj" fmla="val 8889"/>
+                <a:gd name="adj" fmla="val 7843"/>
               </a:avLst>
             </a:prstGeom>
             <a:gradFill>
@@ -4333,7 +4571,7 @@
           </p:nvSpPr>
           <p:spPr>
             <a:xfrm>
-              <a:off x="8331232" y="2324100"/>
+              <a:off x="8331232" y="1638300"/>
               <a:ext cx="1066800" cy="14288"/>
             </a:xfrm>
             <a:prstGeom prst="rect">
@@ -4372,7 +4610,7 @@
           </p:nvSpPr>
           <p:spPr>
             <a:xfrm>
-              <a:off x="8322088" y="2555875"/>
+              <a:off x="8322088" y="1870075"/>
               <a:ext cx="987552" cy="352044"/>
             </a:xfrm>
             <a:prstGeom prst="rect">
@@ -4412,12 +4650,12 @@
           </p:nvSpPr>
           <p:spPr>
             <a:xfrm>
-              <a:off x="8331232" y="2981325"/>
-              <a:ext cx="1104900" cy="762000"/>
+              <a:off x="8331232" y="2314575"/>
+              <a:ext cx="1104900" cy="914400"/>
             </a:xfrm>
             <a:prstGeom prst="roundRect">
               <a:avLst>
-                <a:gd name="adj" fmla="val 17500"/>
+                <a:gd name="adj" fmla="val 14583"/>
               </a:avLst>
             </a:prstGeom>
             <a:gradFill>
@@ -4452,7 +4690,7 @@
           </p:nvSpPr>
           <p:spPr>
             <a:xfrm>
-              <a:off x="8578821" y="3209925"/>
+              <a:off x="8578821" y="2628900"/>
               <a:ext cx="609722" cy="352044"/>
             </a:xfrm>
             <a:prstGeom prst="rect">
@@ -4492,7 +4730,7 @@
           </p:nvSpPr>
           <p:spPr>
             <a:xfrm>
-              <a:off x="9588532" y="3209925"/>
+              <a:off x="9588532" y="2619375"/>
               <a:ext cx="584168" cy="304800"/>
             </a:xfrm>
             <a:prstGeom prst="leftRightArrow">
@@ -4514,12 +4752,12 @@
           </p:nvSpPr>
           <p:spPr>
             <a:xfrm>
-              <a:off x="10325100" y="2981325"/>
-              <a:ext cx="1104900" cy="762000"/>
+              <a:off x="10325100" y="2314575"/>
+              <a:ext cx="1104900" cy="914400"/>
             </a:xfrm>
             <a:prstGeom prst="roundRect">
               <a:avLst>
-                <a:gd name="adj" fmla="val 17500"/>
+                <a:gd name="adj" fmla="val 14583"/>
               </a:avLst>
             </a:prstGeom>
             <a:gradFill>
@@ -4554,7 +4792,7 @@
           </p:nvSpPr>
           <p:spPr>
             <a:xfrm>
-              <a:off x="10572689" y="3209925"/>
+              <a:off x="10572689" y="2628900"/>
               <a:ext cx="609722" cy="352044"/>
             </a:xfrm>
             <a:prstGeom prst="rect">
@@ -4594,12 +4832,12 @@
           </p:nvSpPr>
           <p:spPr>
             <a:xfrm>
-              <a:off x="8331232" y="3857625"/>
-              <a:ext cx="3098768" cy="762000"/>
+              <a:off x="8331232" y="3381375"/>
+              <a:ext cx="3098768" cy="914400"/>
             </a:xfrm>
             <a:prstGeom prst="roundRect">
               <a:avLst>
-                <a:gd name="adj" fmla="val 17500"/>
+                <a:gd name="adj" fmla="val 14583"/>
               </a:avLst>
             </a:prstGeom>
             <a:gradFill>
@@ -4634,7 +4872,7 @@
           </p:nvSpPr>
           <p:spPr>
             <a:xfrm>
-              <a:off x="8476012" y="3984625"/>
+              <a:off x="8476012" y="3565525"/>
               <a:ext cx="1608973" cy="293370"/>
             </a:xfrm>
             <a:prstGeom prst="rect">
@@ -4685,7 +4923,7 @@
           </p:nvSpPr>
           <p:spPr>
             <a:xfrm>
-              <a:off x="8476012" y="4270375"/>
+              <a:off x="8476012" y="3889375"/>
               <a:ext cx="2438400" cy="293370"/>
             </a:xfrm>
             <a:prstGeom prst="rect">
@@ -4720,7 +4958,175 @@
       </p:grpSp>
       <p:grpSp>
         <p:nvGrpSpPr>
-          <p:cNvPr id="50" name="footer"/>
+          <p:cNvPr id="51" name="takeaway"/>
+          <p:cNvGrpSpPr/>
+          <p:nvPr/>
+        </p:nvGrpSpPr>
+        <p:grpSpPr>
+          <a:xfrm>
+            <a:off x="533400" y="4772025"/>
+            <a:ext cx="11125200" cy="800100"/>
+            <a:chOff x="533400" y="4772025"/>
+            <a:chExt cx="11125200" cy="800100"/>
+          </a:xfrm>
+        </p:grpSpPr>
+        <p:sp>
+          <p:nvSpPr>
+            <p:cNvPr id="48" name="Rectangle 48"/>
+            <p:cNvSpPr/>
+            <p:nvPr/>
+          </p:nvSpPr>
+          <p:spPr>
+            <a:xfrm>
+              <a:off x="533400" y="4772025"/>
+              <a:ext cx="11125200" cy="800100"/>
+            </a:xfrm>
+            <a:prstGeom prst="roundRect">
+              <a:avLst>
+                <a:gd name="adj" fmla="val 28571"/>
+              </a:avLst>
+            </a:prstGeom>
+            <a:gradFill>
+              <a:gsLst>
+                <a:gs pos="0">
+                  <a:srgbClr val="FFFDFB">
+                    <a:alpha val="62000"/>
+                  </a:srgbClr>
+                </a:gs>
+                <a:gs pos="48000">
+                  <a:srgbClr val="FFFBF2">
+                    <a:alpha val="55000"/>
+                  </a:srgbClr>
+                </a:gs>
+                <a:gs pos="100000">
+                  <a:srgbClr val="FFF5E4">
+                    <a:alpha val="50000"/>
+                  </a:srgbClr>
+                </a:gs>
+              </a:gsLst>
+              <a:lin ang="2700000" scaled="1"/>
+            </a:gradFill>
+            <a:ln w="9525">
+              <a:solidFill>
+                <a:srgbClr val="BEB2A1">
+                  <a:alpha val="45000"/>
+                </a:srgbClr>
+              </a:solidFill>
+            </a:ln>
+            <a:effectLst>
+              <a:outerShdw blurRad="152400" dist="57150" dir="5400000" algn="ctr" rotWithShape="0">
+                <a:srgbClr val="48341A">
+                  <a:alpha val="9000"/>
+                </a:srgbClr>
+              </a:outerShdw>
+            </a:effectLst>
+          </p:spPr>
+        </p:sp>
+        <p:sp>
+          <p:nvSpPr>
+            <p:cNvPr id="49" name="Rectangle 49"/>
+            <p:cNvSpPr/>
+            <p:nvPr/>
+          </p:nvSpPr>
+          <p:spPr>
+            <a:xfrm>
+              <a:off x="762000" y="4781550"/>
+              <a:ext cx="3333750" cy="14288"/>
+            </a:xfrm>
+            <a:prstGeom prst="rect">
+              <a:avLst/>
+            </a:prstGeom>
+            <a:gradFill>
+              <a:gsLst>
+                <a:gs pos="0">
+                  <a:schemeClr val="lt2">
+                    <a:alpha val="0"/>
+                  </a:schemeClr>
+                </a:gs>
+                <a:gs pos="50000">
+                  <a:schemeClr val="lt2">
+                    <a:alpha val="95000"/>
+                  </a:schemeClr>
+                </a:gs>
+                <a:gs pos="100000">
+                  <a:schemeClr val="lt2">
+                    <a:alpha val="0"/>
+                  </a:schemeClr>
+                </a:gs>
+              </a:gsLst>
+              <a:lin ang="0" scaled="1"/>
+            </a:gradFill>
+            <a:ln>
+              <a:noFill/>
+            </a:ln>
+          </p:spPr>
+        </p:sp>
+        <p:sp>
+          <p:nvSpPr>
+            <p:cNvPr id="50" name="TextBox 50"/>
+            <p:cNvSpPr txBox="1"/>
+            <p:nvPr/>
+          </p:nvSpPr>
+          <p:spPr>
+            <a:xfrm>
+              <a:off x="4269486" y="5041900"/>
+              <a:ext cx="3653028" cy="352044"/>
+            </a:xfrm>
+            <a:prstGeom prst="rect">
+              <a:avLst/>
+            </a:prstGeom>
+            <a:noFill/>
+            <a:ln>
+              <a:noFill/>
+            </a:ln>
+          </p:spPr>
+          <p:txBody>
+            <a:bodyPr wrap="none" lIns="0" tIns="0" rIns="0" bIns="0" anchor="t" anchorCtr="0">
+              <a:spAutoFit/>
+            </a:bodyPr>
+            <a:lstStyle/>
+            <a:p>
+              <a:pPr algn="ctr"/>
+              <a:r>
+                <a:rPr lang="zh-CN" sz="1800" b="1" dirty="0">
+                  <a:solidFill>
+                    <a:srgbClr val="0F1115"/>
+                  </a:solidFill>
+                  <a:latin typeface="+mn-lt"/>
+                  <a:ea typeface="+mn-ea"/>
+                  <a:cs typeface="+mn-cs"/>
+                </a:rPr>
+                <a:t>版本差异</a:t>
+              </a:r>
+              <a:r>
+                <a:rPr lang="zh-CN" sz="1800" b="1" dirty="0">
+                  <a:solidFill>
+                    <a:schemeClr val="accent3"/>
+                  </a:solidFill>
+                  <a:latin typeface="+mn-lt"/>
+                  <a:ea typeface="+mn-ea"/>
+                  <a:cs typeface="+mn-cs"/>
+                </a:rPr>
+                <a:t>确认之后</a:t>
+              </a:r>
+              <a:r>
+                <a:rPr lang="zh-CN" sz="1800" b="1" dirty="0">
+                  <a:solidFill>
+                    <a:srgbClr val="0F1115"/>
+                  </a:solidFill>
+                  <a:latin typeface="+mn-lt"/>
+                  <a:ea typeface="+mn-ea"/>
+                  <a:cs typeface="+mn-cs"/>
+                </a:rPr>
+                <a:t>，再做组间比较</a:t>
+              </a:r>
+            </a:p>
+          </p:txBody>
+        </p:sp>
+      </p:grpSp>
+      <p:grpSp>
+        <p:nvGrpSpPr>
+          <p:cNvPr id="54" name="footer"/>
           <p:cNvGrpSpPr/>
           <p:nvPr/>
         </p:nvGrpSpPr>
@@ -4734,7 +5140,7 @@
         </p:grpSpPr>
         <p:sp>
           <p:nvSpPr>
-            <p:cNvPr id="48" name="TextBox 48"/>
+            <p:cNvPr id="52" name="TextBox 52"/>
             <p:cNvSpPr txBox="1"/>
             <p:nvPr/>
           </p:nvSpPr>
@@ -4774,7 +5180,7 @@
         </p:sp>
         <p:sp>
           <p:nvSpPr>
-            <p:cNvPr id="49" name="TextBox 49"/>
+            <p:cNvPr id="53" name="TextBox 53"/>
             <p:cNvSpPr txBox="1"/>
             <p:nvPr/>
           </p:nvSpPr>
@@ -4961,6 +5367,50 @@
                                         <p:cTn id="15" dur="520"/>
                                         <p:tgtEl>
                                           <p:spTgt spid="47"/>
+                                        </p:tgtEl>
+                                      </p:cBhvr>
+                                    </p:animEffect>
+                                  </p:childTnLst>
+                                </p:cTn>
+                              </p:par>
+                            </p:childTnLst>
+                          </p:cTn>
+                        </p:par>
+                        <p:par>
+                          <p:cTn id="16" fill="hold">
+                            <p:stCondLst>
+                              <p:cond delay="210"/>
+                            </p:stCondLst>
+                            <p:childTnLst>
+                              <p:par>
+                                <p:cTn xmlns:p="http://schemas.openxmlformats.org/presentationml/2006/main" id="17" presetID="10" presetClass="entr" presetSubtype="0" fill="hold" grpId="0" nodeType="withEffect" decel="70000">
+                                  <p:stCondLst>
+                                    <p:cond delay="410"/>
+                                  </p:stCondLst>
+                                  <p:childTnLst>
+                                    <p:set>
+                                      <p:cBhvr>
+                                        <p:cTn id="18" dur="1" fill="hold">
+                                          <p:stCondLst>
+                                            <p:cond delay="0"/>
+                                          </p:stCondLst>
+                                        </p:cTn>
+                                        <p:tgtEl>
+                                          <p:spTgt spid="51"/>
+                                        </p:tgtEl>
+                                        <p:attrNameLst>
+                                          <p:attrName>style.visibility</p:attrName>
+                                        </p:attrNameLst>
+                                      </p:cBhvr>
+                                      <p:to>
+                                        <p:strVal val="visible"/>
+                                      </p:to>
+                                    </p:set>
+                                    <p:animEffect transition="in" filter="fade">
+                                      <p:cBhvr>
+                                        <p:cTn id="19" dur="520"/>
+                                        <p:tgtEl>
+                                          <p:spTgt spid="51"/>
                                         </p:tgtEl>
                                       </p:cBhvr>
                                     </p:animEffect>
@@ -5498,111 +5948,111 @@
           </a:prstGeom>
         </p:spPr>
       </p:pic>
+      <p:sp>
+        <p:nvSpPr>
+          <p:cNvPr id="12" name="data-card-shell"/>
+          <p:cNvSpPr/>
+          <p:nvPr/>
+        </p:nvSpPr>
+        <p:spPr>
+          <a:xfrm>
+            <a:off x="533400" y="1028700"/>
+            <a:ext cx="6356318" cy="5143500"/>
+          </a:xfrm>
+          <a:prstGeom prst="roundRect">
+            <a:avLst>
+              <a:gd name="adj" fmla="val 4444"/>
+            </a:avLst>
+          </a:prstGeom>
+          <a:gradFill>
+            <a:gsLst>
+              <a:gs pos="0">
+                <a:srgbClr val="FFFDFB">
+                  <a:alpha val="62000"/>
+                </a:srgbClr>
+              </a:gs>
+              <a:gs pos="48000">
+                <a:srgbClr val="FFFBF2">
+                  <a:alpha val="55000"/>
+                </a:srgbClr>
+              </a:gs>
+              <a:gs pos="100000">
+                <a:srgbClr val="FFF5E4">
+                  <a:alpha val="50000"/>
+                </a:srgbClr>
+              </a:gs>
+            </a:gsLst>
+            <a:lin ang="2700000" scaled="1"/>
+          </a:gradFill>
+          <a:ln w="9525">
+            <a:solidFill>
+              <a:srgbClr val="BEB2A1">
+                <a:alpha val="45000"/>
+              </a:srgbClr>
+            </a:solidFill>
+          </a:ln>
+          <a:effectLst>
+            <a:outerShdw blurRad="152400" dist="57150" dir="5400000" algn="ctr" rotWithShape="0">
+              <a:srgbClr val="48341A">
+                <a:alpha val="9000"/>
+              </a:srgbClr>
+            </a:outerShdw>
+          </a:effectLst>
+        </p:spPr>
+      </p:sp>
+      <p:sp>
+        <p:nvSpPr>
+          <p:cNvPr id="13" name="data-card-glint"/>
+          <p:cNvSpPr/>
+          <p:nvPr/>
+        </p:nvSpPr>
+        <p:spPr>
+          <a:xfrm>
+            <a:off x="762000" y="1038225"/>
+            <a:ext cx="1905000" cy="14288"/>
+          </a:xfrm>
+          <a:prstGeom prst="rect">
+            <a:avLst/>
+          </a:prstGeom>
+          <a:gradFill>
+            <a:gsLst>
+              <a:gs pos="0">
+                <a:schemeClr val="lt2">
+                  <a:alpha val="0"/>
+                </a:schemeClr>
+              </a:gs>
+              <a:gs pos="50000">
+                <a:schemeClr val="lt2">
+                  <a:alpha val="95000"/>
+                </a:schemeClr>
+              </a:gs>
+              <a:gs pos="100000">
+                <a:schemeClr val="lt2">
+                  <a:alpha val="0"/>
+                </a:schemeClr>
+              </a:gs>
+            </a:gsLst>
+            <a:lin ang="0" scaled="1"/>
+          </a:gradFill>
+          <a:ln>
+            <a:noFill/>
+          </a:ln>
+        </p:spPr>
+      </p:sp>
       <p:grpSp>
         <p:nvGrpSpPr>
-          <p:cNvPr id="22" name="data-card"/>
+          <p:cNvPr id="21" name="data-card"/>
           <p:cNvGrpSpPr/>
           <p:nvPr/>
         </p:nvGrpSpPr>
         <p:grpSpPr>
           <a:xfrm>
-            <a:off x="533400" y="1028700"/>
-            <a:ext cx="6356318" cy="5143500"/>
-            <a:chOff x="533400" y="1028700"/>
-            <a:chExt cx="6356318" cy="5143500"/>
+            <a:off x="752856" y="1270000"/>
+            <a:ext cx="5914358" cy="622046"/>
+            <a:chOff x="752856" y="1270000"/>
+            <a:chExt cx="5914358" cy="622046"/>
           </a:xfrm>
         </p:grpSpPr>
-        <p:sp>
-          <p:nvSpPr>
-            <p:cNvPr id="12" name="Rectangle 12"/>
-            <p:cNvSpPr/>
-            <p:nvPr/>
-          </p:nvSpPr>
-          <p:spPr>
-            <a:xfrm>
-              <a:off x="533400" y="1028700"/>
-              <a:ext cx="6356318" cy="5143500"/>
-            </a:xfrm>
-            <a:prstGeom prst="roundRect">
-              <a:avLst>
-                <a:gd name="adj" fmla="val 4444"/>
-              </a:avLst>
-            </a:prstGeom>
-            <a:gradFill>
-              <a:gsLst>
-                <a:gs pos="0">
-                  <a:srgbClr val="FFFDFB">
-                    <a:alpha val="62000"/>
-                  </a:srgbClr>
-                </a:gs>
-                <a:gs pos="48000">
-                  <a:srgbClr val="FFFBF2">
-                    <a:alpha val="55000"/>
-                  </a:srgbClr>
-                </a:gs>
-                <a:gs pos="100000">
-                  <a:srgbClr val="FFF5E4">
-                    <a:alpha val="50000"/>
-                  </a:srgbClr>
-                </a:gs>
-              </a:gsLst>
-              <a:lin ang="2700000" scaled="1"/>
-            </a:gradFill>
-            <a:ln w="9525">
-              <a:solidFill>
-                <a:srgbClr val="BEB2A1">
-                  <a:alpha val="45000"/>
-                </a:srgbClr>
-              </a:solidFill>
-            </a:ln>
-            <a:effectLst>
-              <a:outerShdw blurRad="152400" dist="57150" dir="5400000" algn="ctr" rotWithShape="0">
-                <a:srgbClr val="48341A">
-                  <a:alpha val="9000"/>
-                </a:srgbClr>
-              </a:outerShdw>
-            </a:effectLst>
-          </p:spPr>
-        </p:sp>
-        <p:sp>
-          <p:nvSpPr>
-            <p:cNvPr id="13" name="Rectangle 13"/>
-            <p:cNvSpPr/>
-            <p:nvPr/>
-          </p:nvSpPr>
-          <p:spPr>
-            <a:xfrm>
-              <a:off x="762000" y="1038225"/>
-              <a:ext cx="1905000" cy="14288"/>
-            </a:xfrm>
-            <a:prstGeom prst="rect">
-              <a:avLst/>
-            </a:prstGeom>
-            <a:gradFill>
-              <a:gsLst>
-                <a:gs pos="0">
-                  <a:schemeClr val="lt2">
-                    <a:alpha val="0"/>
-                  </a:schemeClr>
-                </a:gs>
-                <a:gs pos="50000">
-                  <a:schemeClr val="lt2">
-                    <a:alpha val="95000"/>
-                  </a:schemeClr>
-                </a:gs>
-                <a:gs pos="100000">
-                  <a:schemeClr val="lt2">
-                    <a:alpha val="0"/>
-                  </a:schemeClr>
-                </a:gs>
-              </a:gsLst>
-              <a:lin ang="0" scaled="1"/>
-            </a:gradFill>
-            <a:ln>
-              <a:noFill/>
-            </a:ln>
-          </p:spPr>
-        </p:sp>
         <p:sp>
           <p:nvSpPr>
             <p:cNvPr id="14" name="TextBox 14"/>
@@ -5826,25 +6276,25 @@
             </p:txBody>
           </p:sp>
         </p:grpSp>
-        <p:graphicFrame>
-          <p:nvGraphicFramePr>
-            <p:cNvPr id="21" name="completeness-bars"/>
-            <p:cNvGraphicFramePr>
-              <a:graphicFrameLocks noGrp="1"/>
-            </p:cNvGraphicFramePr>
-            <p:nvPr/>
-          </p:nvGraphicFramePr>
-          <p:xfrm>
-            <a:off x="762000" y="1905000"/>
-            <a:ext cx="5899118" cy="4076700"/>
-          </p:xfrm>
-          <a:graphic>
-            <a:graphicData uri="http://schemas.openxmlformats.org/drawingml/2006/chart">
-              <c:chart xmlns:c="http://schemas.openxmlformats.org/drawingml/2006/chart" r:id="rId4"/>
-            </a:graphicData>
-          </a:graphic>
-        </p:graphicFrame>
       </p:grpSp>
+      <p:graphicFrame>
+        <p:nvGraphicFramePr>
+          <p:cNvPr id="22" name="completeness-bars"/>
+          <p:cNvGraphicFramePr>
+            <a:graphicFrameLocks noGrp="1"/>
+          </p:cNvGraphicFramePr>
+          <p:nvPr/>
+        </p:nvGraphicFramePr>
+        <p:xfrm>
+          <a:off x="762000" y="1905000"/>
+          <a:ext cx="5899118" cy="4076700"/>
+        </p:xfrm>
+        <a:graphic>
+          <a:graphicData uri="http://schemas.openxmlformats.org/drawingml/2006/chart">
+            <c:chart xmlns:c="http://schemas.openxmlformats.org/drawingml/2006/chart" r:id="rId4"/>
+          </a:graphicData>
+        </a:graphic>
+      </p:graphicFrame>
       <p:grpSp>
         <p:nvGrpSpPr>
           <p:cNvPr id="26" name="takeaway"/>
@@ -6000,9 +6450,9 @@
         <p:grpSpPr>
           <a:xfrm>
             <a:off x="7118318" y="2590800"/>
-            <a:ext cx="4540282" cy="1219200"/>
+            <a:ext cx="4540282" cy="1676400"/>
             <a:chOff x="7118318" y="2590800"/>
-            <a:chExt cx="4540282" cy="1219200"/>
+            <a:chExt cx="4540282" cy="1676400"/>
           </a:xfrm>
         </p:grpSpPr>
         <p:sp>
@@ -6014,11 +6464,11 @@
           <p:spPr>
             <a:xfrm>
               <a:off x="7118318" y="2590800"/>
-              <a:ext cx="1411796" cy="1219200"/>
+              <a:ext cx="1411796" cy="1676400"/>
             </a:xfrm>
             <a:prstGeom prst="roundRect">
               <a:avLst>
-                <a:gd name="adj" fmla="val 14062"/>
+                <a:gd name="adj" fmla="val 12144"/>
               </a:avLst>
             </a:prstGeom>
             <a:gradFill>
@@ -6065,7 +6515,7 @@
           </p:nvSpPr>
           <p:spPr>
             <a:xfrm>
-              <a:off x="7520437" y="2908300"/>
+              <a:off x="7520437" y="3098800"/>
               <a:ext cx="607558" cy="469392"/>
             </a:xfrm>
             <a:prstGeom prst="rect">
@@ -6116,7 +6566,7 @@
           </p:nvSpPr>
           <p:spPr>
             <a:xfrm>
-              <a:off x="7656576" y="3390900"/>
+              <a:off x="7656576" y="3638550"/>
               <a:ext cx="335280" cy="234696"/>
             </a:xfrm>
             <a:prstGeom prst="rect">
@@ -6157,11 +6607,11 @@
           <p:spPr>
             <a:xfrm>
               <a:off x="8682609" y="2590800"/>
-              <a:ext cx="1411796" cy="1219200"/>
+              <a:ext cx="1411796" cy="1676400"/>
             </a:xfrm>
             <a:prstGeom prst="roundRect">
               <a:avLst>
-                <a:gd name="adj" fmla="val 14062"/>
+                <a:gd name="adj" fmla="val 12144"/>
               </a:avLst>
             </a:prstGeom>
             <a:gradFill>
@@ -6208,7 +6658,7 @@
           </p:nvSpPr>
           <p:spPr>
             <a:xfrm>
-              <a:off x="9084728" y="2908300"/>
+              <a:off x="9084728" y="3098800"/>
               <a:ext cx="607558" cy="469392"/>
             </a:xfrm>
             <a:prstGeom prst="rect">
@@ -6259,7 +6709,7 @@
           </p:nvSpPr>
           <p:spPr>
             <a:xfrm>
-              <a:off x="9220867" y="3390900"/>
+              <a:off x="9220867" y="3638550"/>
               <a:ext cx="335280" cy="234696"/>
             </a:xfrm>
             <a:prstGeom prst="rect">
@@ -6300,11 +6750,11 @@
           <p:spPr>
             <a:xfrm>
               <a:off x="10246804" y="2590800"/>
-              <a:ext cx="1411796" cy="1219200"/>
+              <a:ext cx="1411796" cy="1676400"/>
             </a:xfrm>
             <a:prstGeom prst="roundRect">
               <a:avLst>
-                <a:gd name="adj" fmla="val 14062"/>
+                <a:gd name="adj" fmla="val 12144"/>
               </a:avLst>
             </a:prstGeom>
             <a:gradFill>
@@ -6351,7 +6801,7 @@
           </p:nvSpPr>
           <p:spPr>
             <a:xfrm>
-              <a:off x="10742215" y="2908300"/>
+              <a:off x="10742215" y="3098800"/>
               <a:ext cx="420975" cy="469392"/>
             </a:xfrm>
             <a:prstGeom prst="rect">
@@ -6402,7 +6852,7 @@
           </p:nvSpPr>
           <p:spPr>
             <a:xfrm>
-              <a:off x="10785062" y="3390900"/>
+              <a:off x="10785062" y="3638550"/>
               <a:ext cx="335280" cy="234696"/>
             </a:xfrm>
             <a:prstGeom prst="rect">
@@ -6443,10 +6893,10 @@
         </p:nvGrpSpPr>
         <p:grpSpPr>
           <a:xfrm>
-            <a:off x="7118318" y="4038600"/>
-            <a:ext cx="4540282" cy="2133600"/>
-            <a:chOff x="7118318" y="4038600"/>
-            <a:chExt cx="4540282" cy="2133600"/>
+            <a:off x="7118318" y="4495800"/>
+            <a:ext cx="4540282" cy="1676400"/>
+            <a:chOff x="7118318" y="4495800"/>
+            <a:chExt cx="4540282" cy="1676400"/>
           </a:xfrm>
         </p:grpSpPr>
         <p:sp>
@@ -6457,12 +6907,12 @@
           </p:nvSpPr>
           <p:spPr>
             <a:xfrm>
-              <a:off x="7118318" y="4038600"/>
-              <a:ext cx="4540282" cy="2133600"/>
+              <a:off x="7118318" y="4495800"/>
+              <a:ext cx="4540282" cy="1676400"/>
             </a:xfrm>
             <a:prstGeom prst="roundRect">
               <a:avLst>
-                <a:gd name="adj" fmla="val 10714"/>
+                <a:gd name="adj" fmla="val 13636"/>
               </a:avLst>
             </a:prstGeom>
             <a:gradFill>
@@ -6509,7 +6959,7 @@
           </p:nvSpPr>
           <p:spPr>
             <a:xfrm>
-              <a:off x="7346918" y="4048125"/>
+              <a:off x="7346918" y="4505325"/>
               <a:ext cx="1362075" cy="14288"/>
             </a:xfrm>
             <a:prstGeom prst="rect">
@@ -6548,8 +6998,8 @@
           </p:nvSpPr>
           <p:spPr>
             <a:xfrm>
-              <a:off x="7337774" y="4279900"/>
-              <a:ext cx="1229868" cy="352044"/>
+              <a:off x="7337774" y="4718050"/>
+              <a:ext cx="987552" cy="352044"/>
             </a:xfrm>
             <a:prstGeom prst="rect">
               <a:avLst/>
@@ -6575,7 +7025,7 @@
                   <a:ea typeface="+mn-ea"/>
                   <a:cs typeface="+mn-cs"/>
                 </a:rPr>
-                <a:t>缺口与口径</a:t>
+                <a:t>缺失处理</a:t>
               </a:r>
             </a:p>
           </p:txBody>
@@ -6588,8 +7038,8 @@
           </p:nvSpPr>
           <p:spPr>
             <a:xfrm>
-              <a:off x="7339298" y="4591050"/>
-              <a:ext cx="3606165" cy="1093470"/>
+              <a:off x="7339298" y="5029200"/>
+              <a:ext cx="2082165" cy="693420"/>
             </a:xfrm>
             <a:prstGeom prst="rect">
               <a:avLst/>
@@ -6625,18 +7075,7 @@
                   <a:ea typeface="+mn-ea"/>
                   <a:cs typeface="+mn-cs"/>
                 </a:rPr>
-                <a:t xml:space="preserve">中心记录缺 </a:t>
-              </a:r>
-              <a:r>
-                <a:rPr lang="zh-CN" sz="1500" b="1" dirty="0">
-                  <a:solidFill>
-                    <a:schemeClr val="accent3"/>
-                  </a:solidFill>
-                  <a:latin typeface="+mn-lt"/>
-                  <a:ea typeface="+mn-ea"/>
-                  <a:cs typeface="+mn-cs"/>
-                </a:rPr>
-                <a:t>3 份</a:t>
+                <a:t>缺失记录保留为空值</a:t>
               </a:r>
             </a:p>
             <a:p>
@@ -6652,55 +7091,9 @@
                 <a:buChar char="•"/>
               </a:pPr>
               <a:r>
-                <a:rPr lang="zh-CN" sz="1500" dirty="0">
-                  <a:solidFill>
-                    <a:schemeClr val="dk1"/>
-                  </a:solidFill>
-                  <a:latin typeface="+mn-lt"/>
-                  <a:ea typeface="+mn-ea"/>
-                  <a:cs typeface="+mn-cs"/>
-                </a:rPr>
-                <a:t xml:space="preserve">安全性报告缺 </a:t>
-              </a:r>
-              <a:r>
                 <a:rPr lang="zh-CN" sz="1500" b="1" dirty="0">
                   <a:solidFill>
-                    <a:schemeClr val="accent3"/>
-                  </a:solidFill>
-                  <a:latin typeface="+mn-lt"/>
-                  <a:ea typeface="+mn-ea"/>
-                  <a:cs typeface="+mn-cs"/>
-                </a:rPr>
-                <a:t>1 份</a:t>
-              </a:r>
-            </a:p>
-            <a:p>
-              <a:pPr algn="l" marL="161925" indent="-161925">
-                <a:lnSpc>
-                  <a:spcPts val="3150"/>
-                </a:lnSpc>
-                <a:buClr>
-                  <a:schemeClr val="dk1"/>
-                </a:buClr>
-                <a:buSzTx/>
-                <a:buFontTx/>
-                <a:buChar char="•"/>
-              </a:pPr>
-              <a:r>
-                <a:rPr lang="zh-CN" sz="1500" dirty="0">
-                  <a:solidFill>
-                    <a:schemeClr val="dk1"/>
-                  </a:solidFill>
-                  <a:latin typeface="+mn-lt"/>
-                  <a:ea typeface="+mn-ea"/>
-                  <a:cs typeface="+mn-cs"/>
-                </a:rPr>
-                <a:t>缺失保留为空值，</a:t>
-              </a:r>
-              <a:r>
-                <a:rPr lang="zh-CN" sz="1500" b="1" dirty="0">
-                  <a:solidFill>
-                    <a:schemeClr val="dk1"/>
+                    <a:srgbClr val="0F1115"/>
                   </a:solidFill>
                   <a:latin typeface="+mn-lt"/>
                   <a:ea typeface="+mn-ea"/>
@@ -6839,7 +7232,7 @@
                             </p:stCondLst>
                             <p:childTnLst>
                               <p:par>
-                                <p:cTn xmlns:p="http://schemas.openxmlformats.org/presentationml/2006/main" id="5" presetID="22" presetClass="entr" presetSubtype="4" fill="hold" grpId="0" nodeType="withEffect" decel="70000">
+                                <p:cTn xmlns:p="http://schemas.openxmlformats.org/presentationml/2006/main" id="5" presetID="10" presetClass="entr" presetSubtype="0" fill="hold" grpId="0" nodeType="withEffect" decel="70000">
                                   <p:stCondLst>
                                     <p:cond delay="0"/>
                                   </p:stCondLst>
@@ -6847,6 +7240,50 @@
                                     <p:set>
                                       <p:cBhvr>
                                         <p:cTn id="6" dur="1" fill="hold">
+                                          <p:stCondLst>
+                                            <p:cond delay="0"/>
+                                          </p:stCondLst>
+                                        </p:cTn>
+                                        <p:tgtEl>
+                                          <p:spTgt spid="21"/>
+                                        </p:tgtEl>
+                                        <p:attrNameLst>
+                                          <p:attrName>style.visibility</p:attrName>
+                                        </p:attrNameLst>
+                                      </p:cBhvr>
+                                      <p:to>
+                                        <p:strVal val="visible"/>
+                                      </p:to>
+                                    </p:set>
+                                    <p:animEffect transition="in" filter="fade">
+                                      <p:cBhvr>
+                                        <p:cTn id="7" dur="520"/>
+                                        <p:tgtEl>
+                                          <p:spTgt spid="21"/>
+                                        </p:tgtEl>
+                                      </p:cBhvr>
+                                    </p:animEffect>
+                                  </p:childTnLst>
+                                </p:cTn>
+                              </p:par>
+                            </p:childTnLst>
+                          </p:cTn>
+                        </p:par>
+                        <p:par>
+                          <p:cTn id="8" fill="hold">
+                            <p:stCondLst>
+                              <p:cond delay="0"/>
+                            </p:stCondLst>
+                            <p:childTnLst>
+                              <p:par>
+                                <p:cTn xmlns:p="http://schemas.openxmlformats.org/presentationml/2006/main" id="9" presetID="22" presetClass="entr" presetSubtype="4" fill="hold" grpId="0" nodeType="withEffect" decel="70000">
+                                  <p:stCondLst>
+                                    <p:cond delay="70"/>
+                                  </p:stCondLst>
+                                  <p:childTnLst>
+                                    <p:set>
+                                      <p:cBhvr>
+                                        <p:cTn id="10" dur="1" fill="hold">
                                           <p:stCondLst>
                                             <p:cond delay="0"/>
                                           </p:stCondLst>
@@ -6864,53 +7301,9 @@
                                     </p:set>
                                     <p:animEffect transition="in" filter="wipe(down)">
                                       <p:cBhvr>
-                                        <p:cTn id="7" dur="1000"/>
+                                        <p:cTn id="11" dur="1000"/>
                                         <p:tgtEl>
                                           <p:spTgt spid="22"/>
-                                        </p:tgtEl>
-                                      </p:cBhvr>
-                                    </p:animEffect>
-                                  </p:childTnLst>
-                                </p:cTn>
-                              </p:par>
-                            </p:childTnLst>
-                          </p:cTn>
-                        </p:par>
-                        <p:par>
-                          <p:cTn id="8" fill="hold">
-                            <p:stCondLst>
-                              <p:cond delay="0"/>
-                            </p:stCondLst>
-                            <p:childTnLst>
-                              <p:par>
-                                <p:cTn xmlns:p="http://schemas.openxmlformats.org/presentationml/2006/main" id="9" presetID="10" presetClass="entr" presetSubtype="0" fill="hold" grpId="0" nodeType="withEffect" decel="70000">
-                                  <p:stCondLst>
-                                    <p:cond delay="70"/>
-                                  </p:stCondLst>
-                                  <p:childTnLst>
-                                    <p:set>
-                                      <p:cBhvr>
-                                        <p:cTn id="10" dur="1" fill="hold">
-                                          <p:stCondLst>
-                                            <p:cond delay="0"/>
-                                          </p:stCondLst>
-                                        </p:cTn>
-                                        <p:tgtEl>
-                                          <p:spTgt spid="36"/>
-                                        </p:tgtEl>
-                                        <p:attrNameLst>
-                                          <p:attrName>style.visibility</p:attrName>
-                                        </p:attrNameLst>
-                                      </p:cBhvr>
-                                      <p:to>
-                                        <p:strVal val="visible"/>
-                                      </p:to>
-                                    </p:set>
-                                    <p:animEffect transition="in" filter="fade">
-                                      <p:cBhvr>
-                                        <p:cTn id="11" dur="520"/>
-                                        <p:tgtEl>
-                                          <p:spTgt spid="36"/>
                                         </p:tgtEl>
                                       </p:cBhvr>
                                     </p:animEffect>
@@ -6940,7 +7333,7 @@
                                           </p:stCondLst>
                                         </p:cTn>
                                         <p:tgtEl>
-                                          <p:spTgt spid="41"/>
+                                          <p:spTgt spid="36"/>
                                         </p:tgtEl>
                                         <p:attrNameLst>
                                           <p:attrName>style.visibility</p:attrName>
@@ -6954,7 +7347,7 @@
                                       <p:cBhvr>
                                         <p:cTn id="15" dur="520"/>
                                         <p:tgtEl>
-                                          <p:spTgt spid="41"/>
+                                          <p:spTgt spid="36"/>
                                         </p:tgtEl>
                                       </p:cBhvr>
                                     </p:animEffect>
@@ -6973,12 +7366,56 @@
                               <p:par>
                                 <p:cTn xmlns:p="http://schemas.openxmlformats.org/presentationml/2006/main" id="17" presetID="10" presetClass="entr" presetSubtype="0" fill="hold" grpId="0" nodeType="withEffect" decel="70000">
                                   <p:stCondLst>
+                                    <p:cond delay="210"/>
+                                  </p:stCondLst>
+                                  <p:childTnLst>
+                                    <p:set>
+                                      <p:cBhvr>
+                                        <p:cTn id="18" dur="1" fill="hold">
+                                          <p:stCondLst>
+                                            <p:cond delay="0"/>
+                                          </p:stCondLst>
+                                        </p:cTn>
+                                        <p:tgtEl>
+                                          <p:spTgt spid="41"/>
+                                        </p:tgtEl>
+                                        <p:attrNameLst>
+                                          <p:attrName>style.visibility</p:attrName>
+                                        </p:attrNameLst>
+                                      </p:cBhvr>
+                                      <p:to>
+                                        <p:strVal val="visible"/>
+                                      </p:to>
+                                    </p:set>
+                                    <p:animEffect transition="in" filter="fade">
+                                      <p:cBhvr>
+                                        <p:cTn id="19" dur="520"/>
+                                        <p:tgtEl>
+                                          <p:spTgt spid="41"/>
+                                        </p:tgtEl>
+                                      </p:cBhvr>
+                                    </p:animEffect>
+                                  </p:childTnLst>
+                                </p:cTn>
+                              </p:par>
+                            </p:childTnLst>
+                          </p:cTn>
+                        </p:par>
+                        <p:par>
+                          <p:cTn id="20" fill="hold">
+                            <p:stCondLst>
+                              <p:cond delay="420"/>
+                            </p:stCondLst>
+                            <p:childTnLst>
+                              <p:par>
+                                <p:cTn xmlns:p="http://schemas.openxmlformats.org/presentationml/2006/main" id="21" presetID="10" presetClass="entr" presetSubtype="0" fill="hold" grpId="0" nodeType="withEffect" decel="70000">
+                                  <p:stCondLst>
                                     <p:cond delay="410"/>
                                   </p:stCondLst>
                                   <p:childTnLst>
                                     <p:set>
                                       <p:cBhvr>
-                                        <p:cTn id="18" dur="1" fill="hold">
+                                        <p:cTn id="22" dur="1" fill="hold">
                                           <p:stCondLst>
                                             <p:cond delay="0"/>
                                           </p:stCondLst>
@@ -6996,7 +7433,7 @@
                                     </p:set>
                                     <p:animEffect transition="in" filter="fade">
                                       <p:cBhvr>
-                                        <p:cTn id="19" dur="520"/>
+                                        <p:cTn id="23" dur="520"/>
                                         <p:tgtEl>
                                           <p:spTgt spid="26"/>
                                         </p:tgtEl>
@@ -7536,111 +7973,111 @@
           </a:prstGeom>
         </p:spPr>
       </p:pic>
+      <p:sp>
+        <p:nvSpPr>
+          <p:cNvPr id="12" name="plan-card-shell"/>
+          <p:cNvSpPr/>
+          <p:nvPr/>
+        </p:nvSpPr>
+        <p:spPr>
+          <a:xfrm>
+            <a:off x="533400" y="1028700"/>
+            <a:ext cx="11125200" cy="5143500"/>
+          </a:xfrm>
+          <a:prstGeom prst="roundRect">
+            <a:avLst>
+              <a:gd name="adj" fmla="val 4444"/>
+            </a:avLst>
+          </a:prstGeom>
+          <a:gradFill>
+            <a:gsLst>
+              <a:gs pos="0">
+                <a:srgbClr val="FFFDFB">
+                  <a:alpha val="62000"/>
+                </a:srgbClr>
+              </a:gs>
+              <a:gs pos="48000">
+                <a:srgbClr val="FFFBF2">
+                  <a:alpha val="55000"/>
+                </a:srgbClr>
+              </a:gs>
+              <a:gs pos="100000">
+                <a:srgbClr val="FFF5E4">
+                  <a:alpha val="50000"/>
+                </a:srgbClr>
+              </a:gs>
+            </a:gsLst>
+            <a:lin ang="2700000" scaled="1"/>
+          </a:gradFill>
+          <a:ln w="9525">
+            <a:solidFill>
+              <a:srgbClr val="BEB2A1">
+                <a:alpha val="45000"/>
+              </a:srgbClr>
+            </a:solidFill>
+          </a:ln>
+          <a:effectLst>
+            <a:outerShdw blurRad="152400" dist="57150" dir="5400000" algn="ctr" rotWithShape="0">
+              <a:srgbClr val="48341A">
+                <a:alpha val="9000"/>
+              </a:srgbClr>
+            </a:outerShdw>
+          </a:effectLst>
+        </p:spPr>
+      </p:sp>
+      <p:sp>
+        <p:nvSpPr>
+          <p:cNvPr id="13" name="plan-card-glint"/>
+          <p:cNvSpPr/>
+          <p:nvPr/>
+        </p:nvSpPr>
+        <p:spPr>
+          <a:xfrm>
+            <a:off x="762000" y="1038225"/>
+            <a:ext cx="3333750" cy="14288"/>
+          </a:xfrm>
+          <a:prstGeom prst="rect">
+            <a:avLst/>
+          </a:prstGeom>
+          <a:gradFill>
+            <a:gsLst>
+              <a:gs pos="0">
+                <a:schemeClr val="lt2">
+                  <a:alpha val="0"/>
+                </a:schemeClr>
+              </a:gs>
+              <a:gs pos="50000">
+                <a:schemeClr val="lt2">
+                  <a:alpha val="95000"/>
+                </a:schemeClr>
+              </a:gs>
+              <a:gs pos="100000">
+                <a:schemeClr val="lt2">
+                  <a:alpha val="0"/>
+                </a:schemeClr>
+              </a:gs>
+            </a:gsLst>
+            <a:lin ang="0" scaled="1"/>
+          </a:gradFill>
+          <a:ln>
+            <a:noFill/>
+          </a:ln>
+        </p:spPr>
+      </p:sp>
       <p:grpSp>
         <p:nvGrpSpPr>
-          <p:cNvPr id="58" name="plan-card"/>
+          <p:cNvPr id="16" name="plan-card"/>
           <p:cNvGrpSpPr/>
           <p:nvPr/>
         </p:nvGrpSpPr>
         <p:grpSpPr>
           <a:xfrm>
-            <a:off x="533400" y="1028700"/>
-            <a:ext cx="11125200" cy="5143500"/>
-            <a:chOff x="533400" y="1028700"/>
-            <a:chExt cx="11125200" cy="5143500"/>
+            <a:off x="752856" y="1270000"/>
+            <a:ext cx="10683240" cy="352044"/>
+            <a:chOff x="752856" y="1270000"/>
+            <a:chExt cx="10683240" cy="352044"/>
           </a:xfrm>
         </p:grpSpPr>
-        <p:sp>
-          <p:nvSpPr>
-            <p:cNvPr id="12" name="Rectangle 12"/>
-            <p:cNvSpPr/>
-            <p:nvPr/>
-          </p:nvSpPr>
-          <p:spPr>
-            <a:xfrm>
-              <a:off x="533400" y="1028700"/>
-              <a:ext cx="11125200" cy="5143500"/>
-            </a:xfrm>
-            <a:prstGeom prst="roundRect">
-              <a:avLst>
-                <a:gd name="adj" fmla="val 4444"/>
-              </a:avLst>
-            </a:prstGeom>
-            <a:gradFill>
-              <a:gsLst>
-                <a:gs pos="0">
-                  <a:srgbClr val="FFFDFB">
-                    <a:alpha val="62000"/>
-                  </a:srgbClr>
-                </a:gs>
-                <a:gs pos="48000">
-                  <a:srgbClr val="FFFBF2">
-                    <a:alpha val="55000"/>
-                  </a:srgbClr>
-                </a:gs>
-                <a:gs pos="100000">
-                  <a:srgbClr val="FFF5E4">
-                    <a:alpha val="50000"/>
-                  </a:srgbClr>
-                </a:gs>
-              </a:gsLst>
-              <a:lin ang="2700000" scaled="1"/>
-            </a:gradFill>
-            <a:ln w="9525">
-              <a:solidFill>
-                <a:srgbClr val="BEB2A1">
-                  <a:alpha val="45000"/>
-                </a:srgbClr>
-              </a:solidFill>
-            </a:ln>
-            <a:effectLst>
-              <a:outerShdw blurRad="152400" dist="57150" dir="5400000" algn="ctr" rotWithShape="0">
-                <a:srgbClr val="48341A">
-                  <a:alpha val="9000"/>
-                </a:srgbClr>
-              </a:outerShdw>
-            </a:effectLst>
-          </p:spPr>
-        </p:sp>
-        <p:sp>
-          <p:nvSpPr>
-            <p:cNvPr id="13" name="Rectangle 13"/>
-            <p:cNvSpPr/>
-            <p:nvPr/>
-          </p:nvSpPr>
-          <p:spPr>
-            <a:xfrm>
-              <a:off x="762000" y="1038225"/>
-              <a:ext cx="3333750" cy="14288"/>
-            </a:xfrm>
-            <a:prstGeom prst="rect">
-              <a:avLst/>
-            </a:prstGeom>
-            <a:gradFill>
-              <a:gsLst>
-                <a:gs pos="0">
-                  <a:schemeClr val="lt2">
-                    <a:alpha val="0"/>
-                  </a:schemeClr>
-                </a:gs>
-                <a:gs pos="50000">
-                  <a:schemeClr val="lt2">
-                    <a:alpha val="95000"/>
-                  </a:schemeClr>
-                </a:gs>
-                <a:gs pos="100000">
-                  <a:schemeClr val="lt2">
-                    <a:alpha val="0"/>
-                  </a:schemeClr>
-                </a:gs>
-              </a:gsLst>
-              <a:lin ang="0" scaled="1"/>
-            </a:gradFill>
-            <a:ln>
-              <a:noFill/>
-            </a:ln>
-          </p:spPr>
-        </p:sp>
         <p:sp>
           <p:nvSpPr>
             <p:cNvPr id="14" name="TextBox 14"/>
@@ -7689,8 +8126,8 @@
           </p:nvSpPr>
           <p:spPr>
             <a:xfrm>
-              <a:off x="8677656" y="1333500"/>
-              <a:ext cx="2758440" cy="234696"/>
+              <a:off x="10454640" y="1333500"/>
+              <a:ext cx="981456" cy="234696"/>
             </a:xfrm>
             <a:prstGeom prst="rect">
               <a:avLst/>
@@ -7716,14 +8153,164 @@
                   <a:ea typeface="+mn-ea"/>
                   <a:cs typeface="+mn-cs"/>
                 </a:rPr>
-                <a:t>合成示例数据｜条形颜色表示负责部门</a:t>
+                <a:t>合成示例数据</a:t>
               </a:r>
             </a:p>
           </p:txBody>
         </p:sp>
+      </p:grpSp>
+      <p:grpSp>
+        <p:nvGrpSpPr>
+          <p:cNvPr id="49" name="check-plan-gantt"/>
+          <p:cNvGrpSpPr/>
+          <p:nvPr/>
+        </p:nvGrpSpPr>
+        <p:grpSpPr>
+          <a:xfrm>
+            <a:off x="754380" y="1676400"/>
+            <a:ext cx="10675620" cy="3438525"/>
+            <a:chOff x="754380" y="1676400"/>
+            <a:chExt cx="10675620" cy="3438525"/>
+          </a:xfrm>
+        </p:grpSpPr>
         <p:grpSp>
           <p:nvGrpSpPr>
-            <p:cNvPr id="49" name="check-plan-gantt"/>
+            <p:cNvPr id="20" name="Group 20"/>
+            <p:cNvGrpSpPr/>
+            <p:nvPr/>
+          </p:nvGrpSpPr>
+          <p:grpSpPr>
+            <a:xfrm>
+              <a:off x="4648581" y="1743075"/>
+              <a:ext cx="5904738" cy="293370"/>
+              <a:chOff x="4648581" y="1743075"/>
+              <a:chExt cx="5904738" cy="293370"/>
+            </a:xfrm>
+          </p:grpSpPr>
+          <p:sp>
+            <p:nvSpPr>
+              <p:cNvPr id="17" name="TextBox 17"/>
+              <p:cNvSpPr txBox="1"/>
+              <p:nvPr/>
+            </p:nvSpPr>
+            <p:spPr>
+              <a:xfrm>
+                <a:off x="4648581" y="1743075"/>
+                <a:ext cx="799338" cy="293370"/>
+              </a:xfrm>
+              <a:prstGeom prst="rect">
+                <a:avLst/>
+              </a:prstGeom>
+              <a:noFill/>
+              <a:ln>
+                <a:noFill/>
+              </a:ln>
+            </p:spPr>
+            <p:txBody>
+              <a:bodyPr wrap="none" lIns="0" tIns="0" rIns="0" bIns="0" anchor="t" anchorCtr="0">
+                <a:spAutoFit/>
+              </a:bodyPr>
+              <a:lstStyle/>
+              <a:p>
+                <a:pPr algn="ctr"/>
+                <a:r>
+                  <a:rPr lang="en-US" sz="1500" b="1" dirty="0">
+                    <a:solidFill>
+                      <a:srgbClr val="0F1115"/>
+                    </a:solidFill>
+                    <a:latin typeface="+mn-lt"/>
+                    <a:ea typeface="+mn-ea"/>
+                    <a:cs typeface="+mn-cs"/>
+                  </a:rPr>
+                  <a:t>2026Q4</a:t>
+                </a:r>
+              </a:p>
+            </p:txBody>
+          </p:sp>
+          <p:sp>
+            <p:nvSpPr>
+              <p:cNvPr id="18" name="TextBox 18"/>
+              <p:cNvSpPr txBox="1"/>
+              <p:nvPr/>
+            </p:nvSpPr>
+            <p:spPr>
+              <a:xfrm>
+                <a:off x="7201281" y="1743075"/>
+                <a:ext cx="799338" cy="293370"/>
+              </a:xfrm>
+              <a:prstGeom prst="rect">
+                <a:avLst/>
+              </a:prstGeom>
+              <a:noFill/>
+              <a:ln>
+                <a:noFill/>
+              </a:ln>
+            </p:spPr>
+            <p:txBody>
+              <a:bodyPr wrap="none" lIns="0" tIns="0" rIns="0" bIns="0" anchor="t" anchorCtr="0">
+                <a:spAutoFit/>
+              </a:bodyPr>
+              <a:lstStyle/>
+              <a:p>
+                <a:pPr algn="ctr"/>
+                <a:r>
+                  <a:rPr lang="en-US" sz="1500" b="1" dirty="0">
+                    <a:solidFill>
+                      <a:srgbClr val="0F1115"/>
+                    </a:solidFill>
+                    <a:latin typeface="+mn-lt"/>
+                    <a:ea typeface="+mn-ea"/>
+                    <a:cs typeface="+mn-cs"/>
+                  </a:rPr>
+                  <a:t>2027Q1</a:t>
+                </a:r>
+              </a:p>
+            </p:txBody>
+          </p:sp>
+          <p:sp>
+            <p:nvSpPr>
+              <p:cNvPr id="19" name="TextBox 19"/>
+              <p:cNvSpPr txBox="1"/>
+              <p:nvPr/>
+            </p:nvSpPr>
+            <p:spPr>
+              <a:xfrm>
+                <a:off x="9753981" y="1743075"/>
+                <a:ext cx="799338" cy="293370"/>
+              </a:xfrm>
+              <a:prstGeom prst="rect">
+                <a:avLst/>
+              </a:prstGeom>
+              <a:noFill/>
+              <a:ln>
+                <a:noFill/>
+              </a:ln>
+            </p:spPr>
+            <p:txBody>
+              <a:bodyPr wrap="none" lIns="0" tIns="0" rIns="0" bIns="0" anchor="t" anchorCtr="0">
+                <a:spAutoFit/>
+              </a:bodyPr>
+              <a:lstStyle/>
+              <a:p>
+                <a:pPr algn="ctr"/>
+                <a:r>
+                  <a:rPr lang="en-US" sz="1500" b="1" dirty="0">
+                    <a:solidFill>
+                      <a:srgbClr val="0F1115"/>
+                    </a:solidFill>
+                    <a:latin typeface="+mn-lt"/>
+                    <a:ea typeface="+mn-ea"/>
+                    <a:cs typeface="+mn-cs"/>
+                  </a:rPr>
+                  <a:t>2027Q2</a:t>
+                </a:r>
+              </a:p>
+            </p:txBody>
+          </p:sp>
+        </p:grpSp>
+        <p:grpSp>
+          <p:nvGrpSpPr>
+            <p:cNvPr id="48" name="check-plan-gantt-chartArea"/>
             <p:cNvGrpSpPr/>
             <p:nvPr/>
           </p:nvGrpSpPr>
@@ -7735,455 +8322,29 @@
               <a:chExt cx="10675620" cy="3438525"/>
             </a:xfrm>
           </p:grpSpPr>
-          <p:sp>
-            <p:nvSpPr>
-              <p:cNvPr id="16" name="deadline-quarter"/>
-              <p:cNvSpPr/>
-              <p:nvPr/>
-            </p:nvSpPr>
-            <p:spPr>
-              <a:xfrm>
-                <a:off x="6324600" y="1676400"/>
-                <a:ext cx="2552700" cy="3429000"/>
-              </a:xfrm>
-              <a:prstGeom prst="rect">
-                <a:avLst/>
-              </a:prstGeom>
-              <a:solidFill>
-                <a:schemeClr val="accent1">
-                  <a:alpha val="7000"/>
-                </a:schemeClr>
-              </a:solidFill>
-              <a:ln>
-                <a:noFill/>
-              </a:ln>
-            </p:spPr>
-          </p:sp>
           <p:grpSp>
             <p:nvGrpSpPr>
-              <p:cNvPr id="20" name="Group 20"/>
+              <p:cNvPr id="28" name="plan-grid"/>
               <p:cNvGrpSpPr/>
               <p:nvPr/>
             </p:nvGrpSpPr>
             <p:grpSpPr>
               <a:xfrm>
-                <a:off x="4648581" y="1743075"/>
-                <a:ext cx="5904738" cy="293370"/>
-                <a:chOff x="4648581" y="1743075"/>
-                <a:chExt cx="5904738" cy="293370"/>
+                <a:off x="762000" y="1676400"/>
+                <a:ext cx="10668000" cy="3429000"/>
+                <a:chOff x="762000" y="1676400"/>
+                <a:chExt cx="10668000" cy="3429000"/>
               </a:xfrm>
             </p:grpSpPr>
             <p:sp>
               <p:nvSpPr>
-                <p:cNvPr id="17" name="TextBox 17"/>
-                <p:cNvSpPr txBox="1"/>
-                <p:nvPr/>
-              </p:nvSpPr>
-              <p:spPr>
-                <a:xfrm>
-                  <a:off x="4648581" y="1743075"/>
-                  <a:ext cx="799338" cy="293370"/>
-                </a:xfrm>
-                <a:prstGeom prst="rect">
-                  <a:avLst/>
-                </a:prstGeom>
-                <a:noFill/>
-                <a:ln>
-                  <a:noFill/>
-                </a:ln>
-              </p:spPr>
-              <p:txBody>
-                <a:bodyPr wrap="none" lIns="0" tIns="0" rIns="0" bIns="0" anchor="t" anchorCtr="0">
-                  <a:spAutoFit/>
-                </a:bodyPr>
-                <a:lstStyle/>
-                <a:p>
-                  <a:pPr algn="ctr"/>
-                  <a:r>
-                    <a:rPr lang="en-US" sz="1500" b="1" dirty="0">
-                      <a:solidFill>
-                        <a:srgbClr val="0F1115"/>
-                      </a:solidFill>
-                      <a:latin typeface="+mn-lt"/>
-                      <a:ea typeface="+mn-ea"/>
-                      <a:cs typeface="+mn-cs"/>
-                    </a:rPr>
-                    <a:t>2026Q4</a:t>
-                  </a:r>
-                </a:p>
-              </p:txBody>
-            </p:sp>
-            <p:sp>
-              <p:nvSpPr>
-                <p:cNvPr id="18" name="TextBox 18"/>
-                <p:cNvSpPr txBox="1"/>
-                <p:nvPr/>
-              </p:nvSpPr>
-              <p:spPr>
-                <a:xfrm>
-                  <a:off x="7201281" y="1743075"/>
-                  <a:ext cx="799338" cy="293370"/>
-                </a:xfrm>
-                <a:prstGeom prst="rect">
-                  <a:avLst/>
-                </a:prstGeom>
-                <a:noFill/>
-                <a:ln>
-                  <a:noFill/>
-                </a:ln>
-              </p:spPr>
-              <p:txBody>
-                <a:bodyPr wrap="none" lIns="0" tIns="0" rIns="0" bIns="0" anchor="t" anchorCtr="0">
-                  <a:spAutoFit/>
-                </a:bodyPr>
-                <a:lstStyle/>
-                <a:p>
-                  <a:pPr algn="ctr"/>
-                  <a:r>
-                    <a:rPr lang="en-US" sz="1500" b="1" dirty="0">
-                      <a:solidFill>
-                        <a:srgbClr val="0F1115"/>
-                      </a:solidFill>
-                      <a:latin typeface="+mn-lt"/>
-                      <a:ea typeface="+mn-ea"/>
-                      <a:cs typeface="+mn-cs"/>
-                    </a:rPr>
-                    <a:t>2027Q1</a:t>
-                  </a:r>
-                </a:p>
-              </p:txBody>
-            </p:sp>
-            <p:sp>
-              <p:nvSpPr>
-                <p:cNvPr id="19" name="TextBox 19"/>
-                <p:cNvSpPr txBox="1"/>
-                <p:nvPr/>
-              </p:nvSpPr>
-              <p:spPr>
-                <a:xfrm>
-                  <a:off x="9753981" y="1743075"/>
-                  <a:ext cx="799338" cy="293370"/>
-                </a:xfrm>
-                <a:prstGeom prst="rect">
-                  <a:avLst/>
-                </a:prstGeom>
-                <a:noFill/>
-                <a:ln>
-                  <a:noFill/>
-                </a:ln>
-              </p:spPr>
-              <p:txBody>
-                <a:bodyPr wrap="none" lIns="0" tIns="0" rIns="0" bIns="0" anchor="t" anchorCtr="0">
-                  <a:spAutoFit/>
-                </a:bodyPr>
-                <a:lstStyle/>
-                <a:p>
-                  <a:pPr algn="ctr"/>
-                  <a:r>
-                    <a:rPr lang="en-US" sz="1500" b="1" dirty="0">
-                      <a:solidFill>
-                        <a:srgbClr val="0F1115"/>
-                      </a:solidFill>
-                      <a:latin typeface="+mn-lt"/>
-                      <a:ea typeface="+mn-ea"/>
-                      <a:cs typeface="+mn-cs"/>
-                    </a:rPr>
-                    <a:t>2027Q2</a:t>
-                  </a:r>
-                </a:p>
-              </p:txBody>
-            </p:sp>
-          </p:grpSp>
-          <p:grpSp>
-            <p:nvGrpSpPr>
-              <p:cNvPr id="48" name="check-plan-gantt-chartArea"/>
-              <p:cNvGrpSpPr/>
-              <p:nvPr/>
-            </p:nvGrpSpPr>
-            <p:grpSpPr>
-              <a:xfrm>
-                <a:off x="754380" y="1676400"/>
-                <a:ext cx="10675620" cy="3438525"/>
-                <a:chOff x="754380" y="1676400"/>
-                <a:chExt cx="10675620" cy="3438525"/>
-              </a:xfrm>
-            </p:grpSpPr>
-            <p:grpSp>
-              <p:nvGrpSpPr>
-                <p:cNvPr id="28" name="plan-grid"/>
-                <p:cNvGrpSpPr/>
-                <p:nvPr/>
-              </p:nvGrpSpPr>
-              <p:grpSpPr>
-                <a:xfrm>
-                  <a:off x="762000" y="1676400"/>
-                  <a:ext cx="10668000" cy="3429000"/>
-                  <a:chOff x="762000" y="1676400"/>
-                  <a:chExt cx="10668000" cy="3429000"/>
-                </a:xfrm>
-              </p:grpSpPr>
-              <p:sp>
-                <p:nvSpPr>
-                  <p:cNvPr id="21" name="Line 21"/>
-                  <p:cNvSpPr/>
-                  <p:nvPr/>
-                </p:nvSpPr>
-                <p:spPr>
-                  <a:xfrm>
-                    <a:off x="762000" y="2057400"/>
-                    <a:ext cx="10668000" cy="9525"/>
-                  </a:xfrm>
-                  <a:custGeom>
-                    <a:avLst/>
-                    <a:gdLst/>
-                    <a:ahLst/>
-                    <a:cxnLst/>
-                    <a:rect l="l" t="t" r="r" b="b"/>
-                    <a:pathLst>
-                      <a:path w="10668000" h="9525">
-                        <a:moveTo>
-                          <a:pt x="0" y="0"/>
-                        </a:moveTo>
-                        <a:lnTo>
-                          <a:pt x="10668000" y="0"/>
-                        </a:lnTo>
-                      </a:path>
-                    </a:pathLst>
-                  </a:custGeom>
-                  <a:noFill/>
-                  <a:ln w="9525">
-                    <a:solidFill>
-                      <a:srgbClr val="E7EBEE"/>
-                    </a:solidFill>
-                  </a:ln>
-                </p:spPr>
-              </p:sp>
-              <p:sp>
-                <p:nvSpPr>
-                  <p:cNvPr id="22" name="Line 22"/>
-                  <p:cNvSpPr/>
-                  <p:nvPr/>
-                </p:nvSpPr>
-                <p:spPr>
-                  <a:xfrm>
-                    <a:off x="762000" y="2667000"/>
-                    <a:ext cx="10668000" cy="9525"/>
-                  </a:xfrm>
-                  <a:custGeom>
-                    <a:avLst/>
-                    <a:gdLst/>
-                    <a:ahLst/>
-                    <a:cxnLst/>
-                    <a:rect l="l" t="t" r="r" b="b"/>
-                    <a:pathLst>
-                      <a:path w="10668000" h="9525">
-                        <a:moveTo>
-                          <a:pt x="0" y="0"/>
-                        </a:moveTo>
-                        <a:lnTo>
-                          <a:pt x="10668000" y="0"/>
-                        </a:lnTo>
-                      </a:path>
-                    </a:pathLst>
-                  </a:custGeom>
-                  <a:noFill/>
-                  <a:ln w="9525">
-                    <a:solidFill>
-                      <a:srgbClr val="E7EBEE"/>
-                    </a:solidFill>
-                  </a:ln>
-                </p:spPr>
-              </p:sp>
-              <p:sp>
-                <p:nvSpPr>
-                  <p:cNvPr id="23" name="Line 23"/>
-                  <p:cNvSpPr/>
-                  <p:nvPr/>
-                </p:nvSpPr>
-                <p:spPr>
-                  <a:xfrm>
-                    <a:off x="762000" y="3276600"/>
-                    <a:ext cx="10668000" cy="9525"/>
-                  </a:xfrm>
-                  <a:custGeom>
-                    <a:avLst/>
-                    <a:gdLst/>
-                    <a:ahLst/>
-                    <a:cxnLst/>
-                    <a:rect l="l" t="t" r="r" b="b"/>
-                    <a:pathLst>
-                      <a:path w="10668000" h="9525">
-                        <a:moveTo>
-                          <a:pt x="0" y="0"/>
-                        </a:moveTo>
-                        <a:lnTo>
-                          <a:pt x="10668000" y="0"/>
-                        </a:lnTo>
-                      </a:path>
-                    </a:pathLst>
-                  </a:custGeom>
-                  <a:noFill/>
-                  <a:ln w="9525">
-                    <a:solidFill>
-                      <a:srgbClr val="E7EBEE"/>
-                    </a:solidFill>
-                  </a:ln>
-                </p:spPr>
-              </p:sp>
-              <p:sp>
-                <p:nvSpPr>
-                  <p:cNvPr id="24" name="Line 24"/>
-                  <p:cNvSpPr/>
-                  <p:nvPr/>
-                </p:nvSpPr>
-                <p:spPr>
-                  <a:xfrm>
-                    <a:off x="762000" y="3886200"/>
-                    <a:ext cx="10668000" cy="9525"/>
-                  </a:xfrm>
-                  <a:custGeom>
-                    <a:avLst/>
-                    <a:gdLst/>
-                    <a:ahLst/>
-                    <a:cxnLst/>
-                    <a:rect l="l" t="t" r="r" b="b"/>
-                    <a:pathLst>
-                      <a:path w="10668000" h="9525">
-                        <a:moveTo>
-                          <a:pt x="0" y="0"/>
-                        </a:moveTo>
-                        <a:lnTo>
-                          <a:pt x="10668000" y="0"/>
-                        </a:lnTo>
-                      </a:path>
-                    </a:pathLst>
-                  </a:custGeom>
-                  <a:noFill/>
-                  <a:ln w="9525">
-                    <a:solidFill>
-                      <a:srgbClr val="E7EBEE"/>
-                    </a:solidFill>
-                  </a:ln>
-                </p:spPr>
-              </p:sp>
-              <p:sp>
-                <p:nvSpPr>
-                  <p:cNvPr id="25" name="Line 25"/>
-                  <p:cNvSpPr/>
-                  <p:nvPr/>
-                </p:nvSpPr>
-                <p:spPr>
-                  <a:xfrm>
-                    <a:off x="762000" y="4495800"/>
-                    <a:ext cx="10668000" cy="9525"/>
-                  </a:xfrm>
-                  <a:custGeom>
-                    <a:avLst/>
-                    <a:gdLst/>
-                    <a:ahLst/>
-                    <a:cxnLst/>
-                    <a:rect l="l" t="t" r="r" b="b"/>
-                    <a:pathLst>
-                      <a:path w="10668000" h="9525">
-                        <a:moveTo>
-                          <a:pt x="0" y="0"/>
-                        </a:moveTo>
-                        <a:lnTo>
-                          <a:pt x="10668000" y="0"/>
-                        </a:lnTo>
-                      </a:path>
-                    </a:pathLst>
-                  </a:custGeom>
-                  <a:noFill/>
-                  <a:ln w="9525">
-                    <a:solidFill>
-                      <a:srgbClr val="E7EBEE"/>
-                    </a:solidFill>
-                  </a:ln>
-                </p:spPr>
-              </p:sp>
-              <p:sp>
-                <p:nvSpPr>
-                  <p:cNvPr id="26" name="Line 26"/>
-                  <p:cNvSpPr/>
-                  <p:nvPr/>
-                </p:nvSpPr>
-                <p:spPr>
-                  <a:xfrm>
-                    <a:off x="6324600" y="1676400"/>
-                    <a:ext cx="9525" cy="3429000"/>
-                  </a:xfrm>
-                  <a:custGeom>
-                    <a:avLst/>
-                    <a:gdLst/>
-                    <a:ahLst/>
-                    <a:cxnLst/>
-                    <a:rect l="l" t="t" r="r" b="b"/>
-                    <a:pathLst>
-                      <a:path w="9525" h="3429000">
-                        <a:moveTo>
-                          <a:pt x="0" y="0"/>
-                        </a:moveTo>
-                        <a:lnTo>
-                          <a:pt x="0" y="3429000"/>
-                        </a:lnTo>
-                      </a:path>
-                    </a:pathLst>
-                  </a:custGeom>
-                  <a:noFill/>
-                  <a:ln w="9525">
-                    <a:solidFill>
-                      <a:srgbClr val="E7EBEE"/>
-                    </a:solidFill>
-                  </a:ln>
-                </p:spPr>
-              </p:sp>
-              <p:sp>
-                <p:nvSpPr>
-                  <p:cNvPr id="27" name="Line 27"/>
-                  <p:cNvSpPr/>
-                  <p:nvPr/>
-                </p:nvSpPr>
-                <p:spPr>
-                  <a:xfrm>
-                    <a:off x="8877300" y="1676400"/>
-                    <a:ext cx="9525" cy="3429000"/>
-                  </a:xfrm>
-                  <a:custGeom>
-                    <a:avLst/>
-                    <a:gdLst/>
-                    <a:ahLst/>
-                    <a:cxnLst/>
-                    <a:rect l="l" t="t" r="r" b="b"/>
-                    <a:pathLst>
-                      <a:path w="9525" h="3429000">
-                        <a:moveTo>
-                          <a:pt x="0" y="0"/>
-                        </a:moveTo>
-                        <a:lnTo>
-                          <a:pt x="0" y="3429000"/>
-                        </a:lnTo>
-                      </a:path>
-                    </a:pathLst>
-                  </a:custGeom>
-                  <a:noFill/>
-                  <a:ln w="9525">
-                    <a:solidFill>
-                      <a:srgbClr val="E7EBEE"/>
-                    </a:solidFill>
-                  </a:ln>
-                </p:spPr>
-              </p:sp>
-            </p:grpSp>
-            <p:sp>
-              <p:nvSpPr>
-                <p:cNvPr id="29" name="Line 29"/>
+                <p:cNvPr id="21" name="Line 21"/>
                 <p:cNvSpPr/>
                 <p:nvPr/>
               </p:nvSpPr>
               <p:spPr>
                 <a:xfrm>
-                  <a:off x="762000" y="5105400"/>
+                  <a:off x="762000" y="2057400"/>
                   <a:ext cx="10668000" cy="9525"/>
                 </a:xfrm>
                 <a:custGeom>
@@ -8204,22 +8365,166 @@
                   </a:pathLst>
                 </a:custGeom>
                 <a:noFill/>
-                <a:ln w="19050">
+                <a:ln w="9525">
                   <a:solidFill>
-                    <a:schemeClr val="accent6"/>
+                    <a:srgbClr val="E7EBEE"/>
                   </a:solidFill>
                 </a:ln>
               </p:spPr>
             </p:sp>
             <p:sp>
               <p:nvSpPr>
-                <p:cNvPr id="30" name="Line 30"/>
+                <p:cNvPr id="22" name="Line 22"/>
                 <p:cNvSpPr/>
                 <p:nvPr/>
               </p:nvSpPr>
               <p:spPr>
                 <a:xfrm>
-                  <a:off x="3771900" y="1676400"/>
+                  <a:off x="762000" y="2667000"/>
+                  <a:ext cx="10668000" cy="9525"/>
+                </a:xfrm>
+                <a:custGeom>
+                  <a:avLst/>
+                  <a:gdLst/>
+                  <a:ahLst/>
+                  <a:cxnLst/>
+                  <a:rect l="l" t="t" r="r" b="b"/>
+                  <a:pathLst>
+                    <a:path w="10668000" h="9525">
+                      <a:moveTo>
+                        <a:pt x="0" y="0"/>
+                      </a:moveTo>
+                      <a:lnTo>
+                        <a:pt x="10668000" y="0"/>
+                      </a:lnTo>
+                    </a:path>
+                  </a:pathLst>
+                </a:custGeom>
+                <a:noFill/>
+                <a:ln w="9525">
+                  <a:solidFill>
+                    <a:srgbClr val="E7EBEE"/>
+                  </a:solidFill>
+                </a:ln>
+              </p:spPr>
+            </p:sp>
+            <p:sp>
+              <p:nvSpPr>
+                <p:cNvPr id="23" name="Line 23"/>
+                <p:cNvSpPr/>
+                <p:nvPr/>
+              </p:nvSpPr>
+              <p:spPr>
+                <a:xfrm>
+                  <a:off x="762000" y="3276600"/>
+                  <a:ext cx="10668000" cy="9525"/>
+                </a:xfrm>
+                <a:custGeom>
+                  <a:avLst/>
+                  <a:gdLst/>
+                  <a:ahLst/>
+                  <a:cxnLst/>
+                  <a:rect l="l" t="t" r="r" b="b"/>
+                  <a:pathLst>
+                    <a:path w="10668000" h="9525">
+                      <a:moveTo>
+                        <a:pt x="0" y="0"/>
+                      </a:moveTo>
+                      <a:lnTo>
+                        <a:pt x="10668000" y="0"/>
+                      </a:lnTo>
+                    </a:path>
+                  </a:pathLst>
+                </a:custGeom>
+                <a:noFill/>
+                <a:ln w="9525">
+                  <a:solidFill>
+                    <a:srgbClr val="E7EBEE"/>
+                  </a:solidFill>
+                </a:ln>
+              </p:spPr>
+            </p:sp>
+            <p:sp>
+              <p:nvSpPr>
+                <p:cNvPr id="24" name="Line 24"/>
+                <p:cNvSpPr/>
+                <p:nvPr/>
+              </p:nvSpPr>
+              <p:spPr>
+                <a:xfrm>
+                  <a:off x="762000" y="3886200"/>
+                  <a:ext cx="10668000" cy="9525"/>
+                </a:xfrm>
+                <a:custGeom>
+                  <a:avLst/>
+                  <a:gdLst/>
+                  <a:ahLst/>
+                  <a:cxnLst/>
+                  <a:rect l="l" t="t" r="r" b="b"/>
+                  <a:pathLst>
+                    <a:path w="10668000" h="9525">
+                      <a:moveTo>
+                        <a:pt x="0" y="0"/>
+                      </a:moveTo>
+                      <a:lnTo>
+                        <a:pt x="10668000" y="0"/>
+                      </a:lnTo>
+                    </a:path>
+                  </a:pathLst>
+                </a:custGeom>
+                <a:noFill/>
+                <a:ln w="9525">
+                  <a:solidFill>
+                    <a:srgbClr val="E7EBEE"/>
+                  </a:solidFill>
+                </a:ln>
+              </p:spPr>
+            </p:sp>
+            <p:sp>
+              <p:nvSpPr>
+                <p:cNvPr id="25" name="Line 25"/>
+                <p:cNvSpPr/>
+                <p:nvPr/>
+              </p:nvSpPr>
+              <p:spPr>
+                <a:xfrm>
+                  <a:off x="762000" y="4495800"/>
+                  <a:ext cx="10668000" cy="9525"/>
+                </a:xfrm>
+                <a:custGeom>
+                  <a:avLst/>
+                  <a:gdLst/>
+                  <a:ahLst/>
+                  <a:cxnLst/>
+                  <a:rect l="l" t="t" r="r" b="b"/>
+                  <a:pathLst>
+                    <a:path w="10668000" h="9525">
+                      <a:moveTo>
+                        <a:pt x="0" y="0"/>
+                      </a:moveTo>
+                      <a:lnTo>
+                        <a:pt x="10668000" y="0"/>
+                      </a:lnTo>
+                    </a:path>
+                  </a:pathLst>
+                </a:custGeom>
+                <a:noFill/>
+                <a:ln w="9525">
+                  <a:solidFill>
+                    <a:srgbClr val="E7EBEE"/>
+                  </a:solidFill>
+                </a:ln>
+              </p:spPr>
+            </p:sp>
+            <p:sp>
+              <p:nvSpPr>
+                <p:cNvPr id="26" name="Line 26"/>
+                <p:cNvSpPr/>
+                <p:nvPr/>
+              </p:nvSpPr>
+              <p:spPr>
+                <a:xfrm>
+                  <a:off x="6324600" y="1676400"/>
                   <a:ext cx="9525" cy="3429000"/>
                 </a:xfrm>
                 <a:custGeom>
@@ -8242,591 +8547,564 @@
                 <a:noFill/>
                 <a:ln w="9525">
                   <a:solidFill>
-                    <a:schemeClr val="accent6"/>
+                    <a:srgbClr val="E7EBEE"/>
                   </a:solidFill>
                 </a:ln>
               </p:spPr>
             </p:sp>
-            <p:grpSp>
-              <p:nvGrpSpPr>
-                <p:cNvPr id="36" name="Group 36"/>
-                <p:cNvGrpSpPr/>
-                <p:nvPr/>
-              </p:nvGrpSpPr>
-              <p:grpSpPr>
-                <a:xfrm>
-                  <a:off x="754380" y="2127250"/>
-                  <a:ext cx="1428750" cy="2731770"/>
-                  <a:chOff x="754380" y="2127250"/>
-                  <a:chExt cx="1428750" cy="2731770"/>
-                </a:xfrm>
-              </p:grpSpPr>
-              <p:sp>
-                <p:nvSpPr>
-                  <p:cNvPr id="31" name="TextBox 31"/>
-                  <p:cNvSpPr txBox="1"/>
-                  <p:nvPr/>
-                </p:nvSpPr>
-                <p:spPr>
-                  <a:xfrm>
-                    <a:off x="754380" y="2127250"/>
-                    <a:ext cx="1226820" cy="293370"/>
-                  </a:xfrm>
-                  <a:prstGeom prst="rect">
-                    <a:avLst/>
-                  </a:prstGeom>
-                  <a:noFill/>
-                  <a:ln>
-                    <a:noFill/>
-                  </a:ln>
-                </p:spPr>
-                <p:txBody>
-                  <a:bodyPr wrap="none" lIns="0" tIns="0" rIns="0" bIns="0" anchor="t" anchorCtr="0">
-                    <a:spAutoFit/>
-                  </a:bodyPr>
-                  <a:lstStyle/>
-                  <a:p>
-                    <a:pPr algn="l"/>
-                    <a:r>
-                      <a:rPr lang="zh-CN" sz="1500" dirty="0">
-                        <a:solidFill>
-                          <a:srgbClr val="0F1115"/>
-                        </a:solidFill>
-                        <a:latin typeface="+mn-lt"/>
-                        <a:ea typeface="+mn-ea"/>
-                        <a:cs typeface="+mn-cs"/>
-                      </a:rPr>
-                      <a:t>缺失资料补收</a:t>
-                    </a:r>
-                  </a:p>
-                </p:txBody>
-              </p:sp>
-              <p:sp>
-                <p:nvSpPr>
-                  <p:cNvPr id="32" name="TextBox 32"/>
-                  <p:cNvSpPr txBox="1"/>
-                  <p:nvPr/>
-                </p:nvSpPr>
-                <p:spPr>
-                  <a:xfrm>
-                    <a:off x="754380" y="2736850"/>
-                    <a:ext cx="1226820" cy="293370"/>
-                  </a:xfrm>
-                  <a:prstGeom prst="rect">
-                    <a:avLst/>
-                  </a:prstGeom>
-                  <a:noFill/>
-                  <a:ln>
-                    <a:noFill/>
-                  </a:ln>
-                </p:spPr>
-                <p:txBody>
-                  <a:bodyPr wrap="none" lIns="0" tIns="0" rIns="0" bIns="0" anchor="t" anchorCtr="0">
-                    <a:spAutoFit/>
-                  </a:bodyPr>
-                  <a:lstStyle/>
-                  <a:p>
-                    <a:pPr algn="l"/>
-                    <a:r>
-                      <a:rPr lang="zh-CN" sz="1500" dirty="0">
-                        <a:solidFill>
-                          <a:srgbClr val="0F1115"/>
-                        </a:solidFill>
-                        <a:latin typeface="+mn-lt"/>
-                        <a:ea typeface="+mn-ea"/>
-                        <a:cs typeface="+mn-cs"/>
-                      </a:rPr>
-                      <a:t>版本差异确认</a:t>
-                    </a:r>
-                  </a:p>
-                </p:txBody>
-              </p:sp>
-              <p:sp>
-                <p:nvSpPr>
-                  <p:cNvPr id="33" name="TextBox 33"/>
-                  <p:cNvSpPr txBox="1"/>
-                  <p:nvPr/>
-                </p:nvSpPr>
-                <p:spPr>
-                  <a:xfrm>
-                    <a:off x="754380" y="3346450"/>
-                    <a:ext cx="1024890" cy="293370"/>
-                  </a:xfrm>
-                  <a:prstGeom prst="rect">
-                    <a:avLst/>
-                  </a:prstGeom>
-                  <a:noFill/>
-                  <a:ln>
-                    <a:noFill/>
-                  </a:ln>
-                </p:spPr>
-                <p:txBody>
-                  <a:bodyPr wrap="none" lIns="0" tIns="0" rIns="0" bIns="0" anchor="t" anchorCtr="0">
-                    <a:spAutoFit/>
-                  </a:bodyPr>
-                  <a:lstStyle/>
-                  <a:p>
-                    <a:pPr algn="l"/>
-                    <a:r>
-                      <a:rPr lang="zh-CN" sz="1500" dirty="0">
-                        <a:solidFill>
-                          <a:srgbClr val="0F1115"/>
-                        </a:solidFill>
-                        <a:latin typeface="+mn-lt"/>
-                        <a:ea typeface="+mn-ea"/>
-                        <a:cs typeface="+mn-cs"/>
-                      </a:rPr>
-                      <a:t>完整性复核</a:t>
-                    </a:r>
-                  </a:p>
-                </p:txBody>
-              </p:sp>
-              <p:sp>
-                <p:nvSpPr>
-                  <p:cNvPr id="34" name="TextBox 34"/>
-                  <p:cNvSpPr txBox="1"/>
-                  <p:nvPr/>
-                </p:nvSpPr>
-                <p:spPr>
-                  <a:xfrm>
-                    <a:off x="754380" y="3956050"/>
-                    <a:ext cx="1428750" cy="293370"/>
-                  </a:xfrm>
-                  <a:prstGeom prst="rect">
-                    <a:avLst/>
-                  </a:prstGeom>
-                  <a:noFill/>
-                  <a:ln>
-                    <a:noFill/>
-                  </a:ln>
-                </p:spPr>
-                <p:txBody>
-                  <a:bodyPr wrap="none" lIns="0" tIns="0" rIns="0" bIns="0" anchor="t" anchorCtr="0">
-                    <a:spAutoFit/>
-                  </a:bodyPr>
-                  <a:lstStyle/>
-                  <a:p>
-                    <a:pPr algn="l"/>
-                    <a:r>
-                      <a:rPr lang="zh-CN" sz="1500" dirty="0">
-                        <a:solidFill>
-                          <a:srgbClr val="0F1115"/>
-                        </a:solidFill>
-                        <a:latin typeface="+mn-lt"/>
-                        <a:ea typeface="+mn-ea"/>
-                        <a:cs typeface="+mn-cs"/>
-                      </a:rPr>
-                      <a:t>安全性报告核对</a:t>
-                    </a:r>
-                  </a:p>
-                </p:txBody>
-              </p:sp>
-              <p:sp>
-                <p:nvSpPr>
-                  <p:cNvPr id="35" name="TextBox 35"/>
-                  <p:cNvSpPr txBox="1"/>
-                  <p:nvPr/>
-                </p:nvSpPr>
-                <p:spPr>
-                  <a:xfrm>
-                    <a:off x="754380" y="4565650"/>
-                    <a:ext cx="1226820" cy="293370"/>
-                  </a:xfrm>
-                  <a:prstGeom prst="rect">
-                    <a:avLst/>
-                  </a:prstGeom>
-                  <a:noFill/>
-                  <a:ln>
-                    <a:noFill/>
-                  </a:ln>
-                </p:spPr>
-                <p:txBody>
-                  <a:bodyPr wrap="none" lIns="0" tIns="0" rIns="0" bIns="0" anchor="t" anchorCtr="0">
-                    <a:spAutoFit/>
-                  </a:bodyPr>
-                  <a:lstStyle/>
-                  <a:p>
-                    <a:pPr algn="l"/>
-                    <a:r>
-                      <a:rPr lang="zh-CN" sz="1500" dirty="0">
-                        <a:solidFill>
-                          <a:srgbClr val="0F1115"/>
-                        </a:solidFill>
-                        <a:latin typeface="+mn-lt"/>
-                        <a:ea typeface="+mn-ea"/>
-                        <a:cs typeface="+mn-cs"/>
-                      </a:rPr>
-                      <a:t>审阅意见形成</a:t>
-                    </a:r>
-                  </a:p>
-                </p:txBody>
-              </p:sp>
-            </p:grpSp>
-            <p:grpSp>
-              <p:nvGrpSpPr>
-                <p:cNvPr id="42" name="Group 42"/>
-                <p:cNvGrpSpPr/>
-                <p:nvPr/>
-              </p:nvGrpSpPr>
-              <p:grpSpPr>
-                <a:xfrm>
-                  <a:off x="755904" y="2381250"/>
-                  <a:ext cx="496824" cy="2673096"/>
-                  <a:chOff x="755904" y="2381250"/>
-                  <a:chExt cx="496824" cy="2673096"/>
-                </a:xfrm>
-              </p:grpSpPr>
-              <p:sp>
-                <p:nvSpPr>
-                  <p:cNvPr id="37" name="TextBox 37"/>
-                  <p:cNvSpPr txBox="1"/>
-                  <p:nvPr/>
-                </p:nvSpPr>
-                <p:spPr>
-                  <a:xfrm>
-                    <a:off x="755904" y="2381250"/>
-                    <a:ext cx="496824" cy="234696"/>
-                  </a:xfrm>
-                  <a:prstGeom prst="rect">
-                    <a:avLst/>
-                  </a:prstGeom>
-                  <a:noFill/>
-                  <a:ln>
-                    <a:noFill/>
-                  </a:ln>
-                </p:spPr>
-                <p:txBody>
-                  <a:bodyPr wrap="none" lIns="0" tIns="0" rIns="0" bIns="0" anchor="t" anchorCtr="0">
-                    <a:spAutoFit/>
-                  </a:bodyPr>
-                  <a:lstStyle/>
-                  <a:p>
-                    <a:pPr algn="l"/>
-                    <a:r>
-                      <a:rPr lang="zh-CN" sz="1200" dirty="0">
-                        <a:solidFill>
-                          <a:schemeClr val="accent5"/>
-                        </a:solidFill>
-                        <a:latin typeface="+mn-lt"/>
-                        <a:ea typeface="+mn-ea"/>
-                        <a:cs typeface="+mn-cs"/>
-                      </a:rPr>
-                      <a:t>医学部</a:t>
-                    </a:r>
-                  </a:p>
-                </p:txBody>
-              </p:sp>
-              <p:sp>
-                <p:nvSpPr>
-                  <p:cNvPr id="38" name="TextBox 38"/>
-                  <p:cNvSpPr txBox="1"/>
-                  <p:nvPr/>
-                </p:nvSpPr>
-                <p:spPr>
-                  <a:xfrm>
-                    <a:off x="755904" y="2990850"/>
-                    <a:ext cx="496824" cy="234696"/>
-                  </a:xfrm>
-                  <a:prstGeom prst="rect">
-                    <a:avLst/>
-                  </a:prstGeom>
-                  <a:noFill/>
-                  <a:ln>
-                    <a:noFill/>
-                  </a:ln>
-                </p:spPr>
-                <p:txBody>
-                  <a:bodyPr wrap="none" lIns="0" tIns="0" rIns="0" bIns="0" anchor="t" anchorCtr="0">
-                    <a:spAutoFit/>
-                  </a:bodyPr>
-                  <a:lstStyle/>
-                  <a:p>
-                    <a:pPr algn="l"/>
-                    <a:r>
-                      <a:rPr lang="zh-CN" sz="1200" dirty="0">
-                        <a:solidFill>
-                          <a:schemeClr val="accent5"/>
-                        </a:solidFill>
-                        <a:latin typeface="+mn-lt"/>
-                        <a:ea typeface="+mn-ea"/>
-                        <a:cs typeface="+mn-cs"/>
-                      </a:rPr>
-                      <a:t>医学部</a:t>
-                    </a:r>
-                  </a:p>
-                </p:txBody>
-              </p:sp>
-              <p:sp>
-                <p:nvSpPr>
-                  <p:cNvPr id="39" name="TextBox 39"/>
-                  <p:cNvSpPr txBox="1"/>
-                  <p:nvPr/>
-                </p:nvSpPr>
-                <p:spPr>
-                  <a:xfrm>
-                    <a:off x="755904" y="3600450"/>
-                    <a:ext cx="335280" cy="234696"/>
-                  </a:xfrm>
-                  <a:prstGeom prst="rect">
-                    <a:avLst/>
-                  </a:prstGeom>
-                  <a:noFill/>
-                  <a:ln>
-                    <a:noFill/>
-                  </a:ln>
-                </p:spPr>
-                <p:txBody>
-                  <a:bodyPr wrap="none" lIns="0" tIns="0" rIns="0" bIns="0" anchor="t" anchorCtr="0">
-                    <a:spAutoFit/>
-                  </a:bodyPr>
-                  <a:lstStyle/>
-                  <a:p>
-                    <a:pPr algn="l"/>
-                    <a:r>
-                      <a:rPr lang="zh-CN" sz="1200" dirty="0">
-                        <a:solidFill>
-                          <a:schemeClr val="accent5"/>
-                        </a:solidFill>
-                        <a:latin typeface="+mn-lt"/>
-                        <a:ea typeface="+mn-ea"/>
-                        <a:cs typeface="+mn-cs"/>
-                      </a:rPr>
-                      <a:t>数统</a:t>
-                    </a:r>
-                  </a:p>
-                </p:txBody>
-              </p:sp>
-              <p:sp>
-                <p:nvSpPr>
-                  <p:cNvPr id="40" name="TextBox 40"/>
-                  <p:cNvSpPr txBox="1"/>
-                  <p:nvPr/>
-                </p:nvSpPr>
-                <p:spPr>
-                  <a:xfrm>
-                    <a:off x="755904" y="4210050"/>
-                    <a:ext cx="199949" cy="234696"/>
-                  </a:xfrm>
-                  <a:prstGeom prst="rect">
-                    <a:avLst/>
-                  </a:prstGeom>
-                  <a:noFill/>
-                  <a:ln>
-                    <a:noFill/>
-                  </a:ln>
-                </p:spPr>
-                <p:txBody>
-                  <a:bodyPr wrap="none" lIns="0" tIns="0" rIns="0" bIns="0" anchor="t" anchorCtr="0">
-                    <a:spAutoFit/>
-                  </a:bodyPr>
-                  <a:lstStyle/>
-                  <a:p>
-                    <a:pPr algn="l"/>
-                    <a:r>
-                      <a:rPr lang="en-US" sz="1200" dirty="0">
-                        <a:solidFill>
-                          <a:schemeClr val="accent5"/>
-                        </a:solidFill>
-                        <a:latin typeface="+mn-lt"/>
-                        <a:ea typeface="+mn-ea"/>
-                        <a:cs typeface="+mn-cs"/>
-                      </a:rPr>
-                      <a:t>PV</a:t>
-                    </a:r>
-                  </a:p>
-                </p:txBody>
-              </p:sp>
-              <p:sp>
-                <p:nvSpPr>
-                  <p:cNvPr id="41" name="TextBox 41"/>
-                  <p:cNvSpPr txBox="1"/>
-                  <p:nvPr/>
-                </p:nvSpPr>
-                <p:spPr>
-                  <a:xfrm>
-                    <a:off x="755904" y="4819650"/>
-                    <a:ext cx="496824" cy="234696"/>
-                  </a:xfrm>
-                  <a:prstGeom prst="rect">
-                    <a:avLst/>
-                  </a:prstGeom>
-                  <a:noFill/>
-                  <a:ln>
-                    <a:noFill/>
-                  </a:ln>
-                </p:spPr>
-                <p:txBody>
-                  <a:bodyPr wrap="none" lIns="0" tIns="0" rIns="0" bIns="0" anchor="t" anchorCtr="0">
-                    <a:spAutoFit/>
-                  </a:bodyPr>
-                  <a:lstStyle/>
-                  <a:p>
-                    <a:pPr algn="l"/>
-                    <a:r>
-                      <a:rPr lang="zh-CN" sz="1200" dirty="0">
-                        <a:solidFill>
-                          <a:schemeClr val="accent5"/>
-                        </a:solidFill>
-                        <a:latin typeface="+mn-lt"/>
-                        <a:ea typeface="+mn-ea"/>
-                        <a:cs typeface="+mn-cs"/>
-                      </a:rPr>
-                      <a:t>医学部</a:t>
-                    </a:r>
-                  </a:p>
-                </p:txBody>
-              </p:sp>
-            </p:grpSp>
             <p:sp>
               <p:nvSpPr>
-                <p:cNvPr id="43" name="Rectangle 43"/>
+                <p:cNvPr id="27" name="Line 27"/>
                 <p:cNvSpPr/>
                 <p:nvPr/>
               </p:nvSpPr>
               <p:spPr>
                 <a:xfrm>
-                  <a:off x="3848100" y="2228850"/>
-                  <a:ext cx="4953000" cy="266700"/>
+                  <a:off x="8877300" y="1676400"/>
+                  <a:ext cx="9525" cy="3429000"/>
                 </a:xfrm>
-                <a:prstGeom prst="roundRect">
-                  <a:avLst>
-                    <a:gd name="adj" fmla="val 28571"/>
-                  </a:avLst>
-                </a:prstGeom>
-                <a:solidFill>
-                  <a:schemeClr val="accent1"/>
-                </a:solidFill>
-                <a:ln>
-                  <a:noFill/>
-                </a:ln>
-              </p:spPr>
-            </p:sp>
-            <p:sp>
-              <p:nvSpPr>
-                <p:cNvPr id="44" name="Rectangle 44"/>
-                <p:cNvSpPr/>
-                <p:nvPr/>
-              </p:nvSpPr>
-              <p:spPr>
-                <a:xfrm>
-                  <a:off x="6400800" y="2838450"/>
-                  <a:ext cx="2400300" cy="266700"/>
-                </a:xfrm>
-                <a:prstGeom prst="roundRect">
-                  <a:avLst>
-                    <a:gd name="adj" fmla="val 28571"/>
-                  </a:avLst>
-                </a:prstGeom>
-                <a:solidFill>
-                  <a:schemeClr val="accent1"/>
-                </a:solidFill>
-                <a:ln>
-                  <a:noFill/>
-                </a:ln>
-              </p:spPr>
-            </p:sp>
-            <p:sp>
-              <p:nvSpPr>
-                <p:cNvPr id="45" name="Rectangle 45"/>
-                <p:cNvSpPr/>
-                <p:nvPr/>
-              </p:nvSpPr>
-              <p:spPr>
-                <a:xfrm>
-                  <a:off x="6400800" y="3448050"/>
-                  <a:ext cx="4953000" cy="266700"/>
-                </a:xfrm>
-                <a:prstGeom prst="roundRect">
-                  <a:avLst>
-                    <a:gd name="adj" fmla="val 28571"/>
-                  </a:avLst>
-                </a:prstGeom>
-                <a:solidFill>
-                  <a:srgbClr val="587B3B"/>
-                </a:solidFill>
-                <a:ln>
-                  <a:noFill/>
-                </a:ln>
-              </p:spPr>
-            </p:sp>
-            <p:sp>
-              <p:nvSpPr>
-                <p:cNvPr id="46" name="Rectangle 46"/>
-                <p:cNvSpPr/>
-                <p:nvPr/>
-              </p:nvSpPr>
-              <p:spPr>
-                <a:xfrm>
-                  <a:off x="6400800" y="4057650"/>
-                  <a:ext cx="4953000" cy="266700"/>
-                </a:xfrm>
-                <a:prstGeom prst="roundRect">
-                  <a:avLst>
-                    <a:gd name="adj" fmla="val 28571"/>
-                  </a:avLst>
-                </a:prstGeom>
-                <a:solidFill>
-                  <a:srgbClr val="A85F34"/>
-                </a:solidFill>
-                <a:ln>
-                  <a:noFill/>
-                </a:ln>
-              </p:spPr>
-            </p:sp>
-            <p:sp>
-              <p:nvSpPr>
-                <p:cNvPr id="47" name="Rectangle 47"/>
-                <p:cNvSpPr/>
-                <p:nvPr/>
-              </p:nvSpPr>
-              <p:spPr>
-                <a:xfrm>
-                  <a:off x="8953500" y="4667250"/>
-                  <a:ext cx="2400300" cy="266700"/>
-                </a:xfrm>
-                <a:prstGeom prst="roundRect">
-                  <a:avLst>
-                    <a:gd name="adj" fmla="val 28571"/>
-                  </a:avLst>
-                </a:prstGeom>
-                <a:solidFill>
-                  <a:schemeClr val="accent1"/>
-                </a:solidFill>
-                <a:ln>
-                  <a:noFill/>
+                <a:custGeom>
+                  <a:avLst/>
+                  <a:gdLst/>
+                  <a:ahLst/>
+                  <a:cxnLst/>
+                  <a:rect l="l" t="t" r="r" b="b"/>
+                  <a:pathLst>
+                    <a:path w="9525" h="3429000">
+                      <a:moveTo>
+                        <a:pt x="0" y="0"/>
+                      </a:moveTo>
+                      <a:lnTo>
+                        <a:pt x="0" y="3429000"/>
+                      </a:lnTo>
+                    </a:path>
+                  </a:pathLst>
+                </a:custGeom>
+                <a:noFill/>
+                <a:ln w="9525">
+                  <a:solidFill>
+                    <a:srgbClr val="E7EBEE"/>
+                  </a:solidFill>
                 </a:ln>
               </p:spPr>
             </p:sp>
           </p:grpSp>
-        </p:grpSp>
-        <p:grpSp>
-          <p:nvGrpSpPr>
-            <p:cNvPr id="56" name="plan-legend"/>
-            <p:cNvGrpSpPr/>
-            <p:nvPr/>
-          </p:nvGrpSpPr>
-          <p:grpSpPr>
-            <a:xfrm>
-              <a:off x="762000" y="5314950"/>
-              <a:ext cx="1965503" cy="234696"/>
-              <a:chOff x="762000" y="5314950"/>
-              <a:chExt cx="1965503" cy="234696"/>
-            </a:xfrm>
-          </p:grpSpPr>
           <p:sp>
             <p:nvSpPr>
-              <p:cNvPr id="50" name="Rectangle 50"/>
+              <p:cNvPr id="29" name="Line 29"/>
               <p:cNvSpPr/>
               <p:nvPr/>
             </p:nvSpPr>
             <p:spPr>
               <a:xfrm>
-                <a:off x="762000" y="5353050"/>
-                <a:ext cx="152400" cy="114300"/>
+                <a:off x="762000" y="5105400"/>
+                <a:ext cx="10668000" cy="9525"/>
+              </a:xfrm>
+              <a:custGeom>
+                <a:avLst/>
+                <a:gdLst/>
+                <a:ahLst/>
+                <a:cxnLst/>
+                <a:rect l="l" t="t" r="r" b="b"/>
+                <a:pathLst>
+                  <a:path w="10668000" h="9525">
+                    <a:moveTo>
+                      <a:pt x="0" y="0"/>
+                    </a:moveTo>
+                    <a:lnTo>
+                      <a:pt x="10668000" y="0"/>
+                    </a:lnTo>
+                  </a:path>
+                </a:pathLst>
+              </a:custGeom>
+              <a:noFill/>
+              <a:ln w="19050">
+                <a:solidFill>
+                  <a:schemeClr val="accent6"/>
+                </a:solidFill>
+              </a:ln>
+            </p:spPr>
+          </p:sp>
+          <p:sp>
+            <p:nvSpPr>
+              <p:cNvPr id="30" name="Line 30"/>
+              <p:cNvSpPr/>
+              <p:nvPr/>
+            </p:nvSpPr>
+            <p:spPr>
+              <a:xfrm>
+                <a:off x="3771900" y="1676400"/>
+                <a:ext cx="9525" cy="3429000"/>
+              </a:xfrm>
+              <a:custGeom>
+                <a:avLst/>
+                <a:gdLst/>
+                <a:ahLst/>
+                <a:cxnLst/>
+                <a:rect l="l" t="t" r="r" b="b"/>
+                <a:pathLst>
+                  <a:path w="9525" h="3429000">
+                    <a:moveTo>
+                      <a:pt x="0" y="0"/>
+                    </a:moveTo>
+                    <a:lnTo>
+                      <a:pt x="0" y="3429000"/>
+                    </a:lnTo>
+                  </a:path>
+                </a:pathLst>
+              </a:custGeom>
+              <a:noFill/>
+              <a:ln w="9525">
+                <a:solidFill>
+                  <a:schemeClr val="accent6"/>
+                </a:solidFill>
+              </a:ln>
+            </p:spPr>
+          </p:sp>
+          <p:grpSp>
+            <p:nvGrpSpPr>
+              <p:cNvPr id="36" name="Group 36"/>
+              <p:cNvGrpSpPr/>
+              <p:nvPr/>
+            </p:nvGrpSpPr>
+            <p:grpSpPr>
+              <a:xfrm>
+                <a:off x="754380" y="2127250"/>
+                <a:ext cx="1428750" cy="2731770"/>
+                <a:chOff x="754380" y="2127250"/>
+                <a:chExt cx="1428750" cy="2731770"/>
+              </a:xfrm>
+            </p:grpSpPr>
+            <p:sp>
+              <p:nvSpPr>
+                <p:cNvPr id="31" name="TextBox 31"/>
+                <p:cNvSpPr txBox="1"/>
+                <p:nvPr/>
+              </p:nvSpPr>
+              <p:spPr>
+                <a:xfrm>
+                  <a:off x="754380" y="2127250"/>
+                  <a:ext cx="1226820" cy="293370"/>
+                </a:xfrm>
+                <a:prstGeom prst="rect">
+                  <a:avLst/>
+                </a:prstGeom>
+                <a:noFill/>
+                <a:ln>
+                  <a:noFill/>
+                </a:ln>
+              </p:spPr>
+              <p:txBody>
+                <a:bodyPr wrap="none" lIns="0" tIns="0" rIns="0" bIns="0" anchor="t" anchorCtr="0">
+                  <a:spAutoFit/>
+                </a:bodyPr>
+                <a:lstStyle/>
+                <a:p>
+                  <a:pPr algn="l"/>
+                  <a:r>
+                    <a:rPr lang="zh-CN" sz="1500" dirty="0">
+                      <a:solidFill>
+                        <a:srgbClr val="0F1115"/>
+                      </a:solidFill>
+                      <a:latin typeface="+mn-lt"/>
+                      <a:ea typeface="+mn-ea"/>
+                      <a:cs typeface="+mn-cs"/>
+                    </a:rPr>
+                    <a:t>缺失资料补收</a:t>
+                  </a:r>
+                </a:p>
+              </p:txBody>
+            </p:sp>
+            <p:sp>
+              <p:nvSpPr>
+                <p:cNvPr id="32" name="TextBox 32"/>
+                <p:cNvSpPr txBox="1"/>
+                <p:nvPr/>
+              </p:nvSpPr>
+              <p:spPr>
+                <a:xfrm>
+                  <a:off x="754380" y="2736850"/>
+                  <a:ext cx="1226820" cy="293370"/>
+                </a:xfrm>
+                <a:prstGeom prst="rect">
+                  <a:avLst/>
+                </a:prstGeom>
+                <a:noFill/>
+                <a:ln>
+                  <a:noFill/>
+                </a:ln>
+              </p:spPr>
+              <p:txBody>
+                <a:bodyPr wrap="none" lIns="0" tIns="0" rIns="0" bIns="0" anchor="t" anchorCtr="0">
+                  <a:spAutoFit/>
+                </a:bodyPr>
+                <a:lstStyle/>
+                <a:p>
+                  <a:pPr algn="l"/>
+                  <a:r>
+                    <a:rPr lang="zh-CN" sz="1500" dirty="0">
+                      <a:solidFill>
+                        <a:srgbClr val="0F1115"/>
+                      </a:solidFill>
+                      <a:latin typeface="+mn-lt"/>
+                      <a:ea typeface="+mn-ea"/>
+                      <a:cs typeface="+mn-cs"/>
+                    </a:rPr>
+                    <a:t>版本差异确认</a:t>
+                  </a:r>
+                </a:p>
+              </p:txBody>
+            </p:sp>
+            <p:sp>
+              <p:nvSpPr>
+                <p:cNvPr id="33" name="TextBox 33"/>
+                <p:cNvSpPr txBox="1"/>
+                <p:nvPr/>
+              </p:nvSpPr>
+              <p:spPr>
+                <a:xfrm>
+                  <a:off x="754380" y="3346450"/>
+                  <a:ext cx="1024890" cy="293370"/>
+                </a:xfrm>
+                <a:prstGeom prst="rect">
+                  <a:avLst/>
+                </a:prstGeom>
+                <a:noFill/>
+                <a:ln>
+                  <a:noFill/>
+                </a:ln>
+              </p:spPr>
+              <p:txBody>
+                <a:bodyPr wrap="none" lIns="0" tIns="0" rIns="0" bIns="0" anchor="t" anchorCtr="0">
+                  <a:spAutoFit/>
+                </a:bodyPr>
+                <a:lstStyle/>
+                <a:p>
+                  <a:pPr algn="l"/>
+                  <a:r>
+                    <a:rPr lang="zh-CN" sz="1500" dirty="0">
+                      <a:solidFill>
+                        <a:srgbClr val="0F1115"/>
+                      </a:solidFill>
+                      <a:latin typeface="+mn-lt"/>
+                      <a:ea typeface="+mn-ea"/>
+                      <a:cs typeface="+mn-cs"/>
+                    </a:rPr>
+                    <a:t>完整性复核</a:t>
+                  </a:r>
+                </a:p>
+              </p:txBody>
+            </p:sp>
+            <p:sp>
+              <p:nvSpPr>
+                <p:cNvPr id="34" name="TextBox 34"/>
+                <p:cNvSpPr txBox="1"/>
+                <p:nvPr/>
+              </p:nvSpPr>
+              <p:spPr>
+                <a:xfrm>
+                  <a:off x="754380" y="3956050"/>
+                  <a:ext cx="1428750" cy="293370"/>
+                </a:xfrm>
+                <a:prstGeom prst="rect">
+                  <a:avLst/>
+                </a:prstGeom>
+                <a:noFill/>
+                <a:ln>
+                  <a:noFill/>
+                </a:ln>
+              </p:spPr>
+              <p:txBody>
+                <a:bodyPr wrap="none" lIns="0" tIns="0" rIns="0" bIns="0" anchor="t" anchorCtr="0">
+                  <a:spAutoFit/>
+                </a:bodyPr>
+                <a:lstStyle/>
+                <a:p>
+                  <a:pPr algn="l"/>
+                  <a:r>
+                    <a:rPr lang="zh-CN" sz="1500" dirty="0">
+                      <a:solidFill>
+                        <a:srgbClr val="0F1115"/>
+                      </a:solidFill>
+                      <a:latin typeface="+mn-lt"/>
+                      <a:ea typeface="+mn-ea"/>
+                      <a:cs typeface="+mn-cs"/>
+                    </a:rPr>
+                    <a:t>安全性报告核对</a:t>
+                  </a:r>
+                </a:p>
+              </p:txBody>
+            </p:sp>
+            <p:sp>
+              <p:nvSpPr>
+                <p:cNvPr id="35" name="TextBox 35"/>
+                <p:cNvSpPr txBox="1"/>
+                <p:nvPr/>
+              </p:nvSpPr>
+              <p:spPr>
+                <a:xfrm>
+                  <a:off x="754380" y="4565650"/>
+                  <a:ext cx="1226820" cy="293370"/>
+                </a:xfrm>
+                <a:prstGeom prst="rect">
+                  <a:avLst/>
+                </a:prstGeom>
+                <a:noFill/>
+                <a:ln>
+                  <a:noFill/>
+                </a:ln>
+              </p:spPr>
+              <p:txBody>
+                <a:bodyPr wrap="none" lIns="0" tIns="0" rIns="0" bIns="0" anchor="t" anchorCtr="0">
+                  <a:spAutoFit/>
+                </a:bodyPr>
+                <a:lstStyle/>
+                <a:p>
+                  <a:pPr algn="l"/>
+                  <a:r>
+                    <a:rPr lang="zh-CN" sz="1500" dirty="0">
+                      <a:solidFill>
+                        <a:srgbClr val="0F1115"/>
+                      </a:solidFill>
+                      <a:latin typeface="+mn-lt"/>
+                      <a:ea typeface="+mn-ea"/>
+                      <a:cs typeface="+mn-cs"/>
+                    </a:rPr>
+                    <a:t>审阅意见形成</a:t>
+                  </a:r>
+                </a:p>
+              </p:txBody>
+            </p:sp>
+          </p:grpSp>
+          <p:grpSp>
+            <p:nvGrpSpPr>
+              <p:cNvPr id="42" name="Group 42"/>
+              <p:cNvGrpSpPr/>
+              <p:nvPr/>
+            </p:nvGrpSpPr>
+            <p:grpSpPr>
+              <a:xfrm>
+                <a:off x="755904" y="2381250"/>
+                <a:ext cx="496824" cy="2673096"/>
+                <a:chOff x="755904" y="2381250"/>
+                <a:chExt cx="496824" cy="2673096"/>
+              </a:xfrm>
+            </p:grpSpPr>
+            <p:sp>
+              <p:nvSpPr>
+                <p:cNvPr id="37" name="TextBox 37"/>
+                <p:cNvSpPr txBox="1"/>
+                <p:nvPr/>
+              </p:nvSpPr>
+              <p:spPr>
+                <a:xfrm>
+                  <a:off x="755904" y="2381250"/>
+                  <a:ext cx="496824" cy="234696"/>
+                </a:xfrm>
+                <a:prstGeom prst="rect">
+                  <a:avLst/>
+                </a:prstGeom>
+                <a:noFill/>
+                <a:ln>
+                  <a:noFill/>
+                </a:ln>
+              </p:spPr>
+              <p:txBody>
+                <a:bodyPr wrap="none" lIns="0" tIns="0" rIns="0" bIns="0" anchor="t" anchorCtr="0">
+                  <a:spAutoFit/>
+                </a:bodyPr>
+                <a:lstStyle/>
+                <a:p>
+                  <a:pPr algn="l"/>
+                  <a:r>
+                    <a:rPr lang="zh-CN" sz="1200" dirty="0">
+                      <a:solidFill>
+                        <a:schemeClr val="accent5"/>
+                      </a:solidFill>
+                      <a:latin typeface="+mn-lt"/>
+                      <a:ea typeface="+mn-ea"/>
+                      <a:cs typeface="+mn-cs"/>
+                    </a:rPr>
+                    <a:t>医学部</a:t>
+                  </a:r>
+                </a:p>
+              </p:txBody>
+            </p:sp>
+            <p:sp>
+              <p:nvSpPr>
+                <p:cNvPr id="38" name="TextBox 38"/>
+                <p:cNvSpPr txBox="1"/>
+                <p:nvPr/>
+              </p:nvSpPr>
+              <p:spPr>
+                <a:xfrm>
+                  <a:off x="755904" y="2990850"/>
+                  <a:ext cx="496824" cy="234696"/>
+                </a:xfrm>
+                <a:prstGeom prst="rect">
+                  <a:avLst/>
+                </a:prstGeom>
+                <a:noFill/>
+                <a:ln>
+                  <a:noFill/>
+                </a:ln>
+              </p:spPr>
+              <p:txBody>
+                <a:bodyPr wrap="none" lIns="0" tIns="0" rIns="0" bIns="0" anchor="t" anchorCtr="0">
+                  <a:spAutoFit/>
+                </a:bodyPr>
+                <a:lstStyle/>
+                <a:p>
+                  <a:pPr algn="l"/>
+                  <a:r>
+                    <a:rPr lang="zh-CN" sz="1200" dirty="0">
+                      <a:solidFill>
+                        <a:schemeClr val="accent5"/>
+                      </a:solidFill>
+                      <a:latin typeface="+mn-lt"/>
+                      <a:ea typeface="+mn-ea"/>
+                      <a:cs typeface="+mn-cs"/>
+                    </a:rPr>
+                    <a:t>医学部</a:t>
+                  </a:r>
+                </a:p>
+              </p:txBody>
+            </p:sp>
+            <p:sp>
+              <p:nvSpPr>
+                <p:cNvPr id="39" name="TextBox 39"/>
+                <p:cNvSpPr txBox="1"/>
+                <p:nvPr/>
+              </p:nvSpPr>
+              <p:spPr>
+                <a:xfrm>
+                  <a:off x="755904" y="3600450"/>
+                  <a:ext cx="335280" cy="234696"/>
+                </a:xfrm>
+                <a:prstGeom prst="rect">
+                  <a:avLst/>
+                </a:prstGeom>
+                <a:noFill/>
+                <a:ln>
+                  <a:noFill/>
+                </a:ln>
+              </p:spPr>
+              <p:txBody>
+                <a:bodyPr wrap="none" lIns="0" tIns="0" rIns="0" bIns="0" anchor="t" anchorCtr="0">
+                  <a:spAutoFit/>
+                </a:bodyPr>
+                <a:lstStyle/>
+                <a:p>
+                  <a:pPr algn="l"/>
+                  <a:r>
+                    <a:rPr lang="zh-CN" sz="1200" dirty="0">
+                      <a:solidFill>
+                        <a:schemeClr val="accent5"/>
+                      </a:solidFill>
+                      <a:latin typeface="+mn-lt"/>
+                      <a:ea typeface="+mn-ea"/>
+                      <a:cs typeface="+mn-cs"/>
+                    </a:rPr>
+                    <a:t>数统</a:t>
+                  </a:r>
+                </a:p>
+              </p:txBody>
+            </p:sp>
+            <p:sp>
+              <p:nvSpPr>
+                <p:cNvPr id="40" name="TextBox 40"/>
+                <p:cNvSpPr txBox="1"/>
+                <p:nvPr/>
+              </p:nvSpPr>
+              <p:spPr>
+                <a:xfrm>
+                  <a:off x="755904" y="4210050"/>
+                  <a:ext cx="199949" cy="234696"/>
+                </a:xfrm>
+                <a:prstGeom prst="rect">
+                  <a:avLst/>
+                </a:prstGeom>
+                <a:noFill/>
+                <a:ln>
+                  <a:noFill/>
+                </a:ln>
+              </p:spPr>
+              <p:txBody>
+                <a:bodyPr wrap="none" lIns="0" tIns="0" rIns="0" bIns="0" anchor="t" anchorCtr="0">
+                  <a:spAutoFit/>
+                </a:bodyPr>
+                <a:lstStyle/>
+                <a:p>
+                  <a:pPr algn="l"/>
+                  <a:r>
+                    <a:rPr lang="en-US" sz="1200" dirty="0">
+                      <a:solidFill>
+                        <a:schemeClr val="accent5"/>
+                      </a:solidFill>
+                      <a:latin typeface="+mn-lt"/>
+                      <a:ea typeface="+mn-ea"/>
+                      <a:cs typeface="+mn-cs"/>
+                    </a:rPr>
+                    <a:t>PV</a:t>
+                  </a:r>
+                </a:p>
+              </p:txBody>
+            </p:sp>
+            <p:sp>
+              <p:nvSpPr>
+                <p:cNvPr id="41" name="TextBox 41"/>
+                <p:cNvSpPr txBox="1"/>
+                <p:nvPr/>
+              </p:nvSpPr>
+              <p:spPr>
+                <a:xfrm>
+                  <a:off x="755904" y="4819650"/>
+                  <a:ext cx="496824" cy="234696"/>
+                </a:xfrm>
+                <a:prstGeom prst="rect">
+                  <a:avLst/>
+                </a:prstGeom>
+                <a:noFill/>
+                <a:ln>
+                  <a:noFill/>
+                </a:ln>
+              </p:spPr>
+              <p:txBody>
+                <a:bodyPr wrap="none" lIns="0" tIns="0" rIns="0" bIns="0" anchor="t" anchorCtr="0">
+                  <a:spAutoFit/>
+                </a:bodyPr>
+                <a:lstStyle/>
+                <a:p>
+                  <a:pPr algn="l"/>
+                  <a:r>
+                    <a:rPr lang="zh-CN" sz="1200" dirty="0">
+                      <a:solidFill>
+                        <a:schemeClr val="accent5"/>
+                      </a:solidFill>
+                      <a:latin typeface="+mn-lt"/>
+                      <a:ea typeface="+mn-ea"/>
+                      <a:cs typeface="+mn-cs"/>
+                    </a:rPr>
+                    <a:t>医学部</a:t>
+                  </a:r>
+                </a:p>
+              </p:txBody>
+            </p:sp>
+          </p:grpSp>
+          <p:sp>
+            <p:nvSpPr>
+              <p:cNvPr id="43" name="Rectangle 43"/>
+              <p:cNvSpPr/>
+              <p:nvPr/>
+            </p:nvSpPr>
+            <p:spPr>
+              <a:xfrm>
+                <a:off x="3848100" y="2228850"/>
+                <a:ext cx="4953000" cy="266700"/>
               </a:xfrm>
               <a:prstGeom prst="roundRect">
                 <a:avLst>
-                  <a:gd name="adj" fmla="val 25000"/>
+                  <a:gd name="adj" fmla="val 28571"/>
                 </a:avLst>
               </a:prstGeom>
               <a:solidFill>
@@ -8839,58 +9117,42 @@
           </p:sp>
           <p:sp>
             <p:nvSpPr>
-              <p:cNvPr id="51" name="TextBox 51"/>
-              <p:cNvSpPr txBox="1"/>
-              <p:nvPr/>
-            </p:nvSpPr>
-            <p:spPr>
-              <a:xfrm>
-                <a:off x="965454" y="5314950"/>
-                <a:ext cx="496824" cy="234696"/>
-              </a:xfrm>
-              <a:prstGeom prst="rect">
-                <a:avLst/>
-              </a:prstGeom>
-              <a:noFill/>
-              <a:ln>
-                <a:noFill/>
-              </a:ln>
-            </p:spPr>
-            <p:txBody>
-              <a:bodyPr wrap="none" lIns="0" tIns="0" rIns="0" bIns="0" anchor="t" anchorCtr="0">
-                <a:spAutoFit/>
-              </a:bodyPr>
-              <a:lstStyle/>
-              <a:p>
-                <a:pPr algn="l"/>
-                <a:r>
-                  <a:rPr lang="zh-CN" sz="1200" dirty="0">
-                    <a:solidFill>
-                      <a:schemeClr val="dk1"/>
-                    </a:solidFill>
-                    <a:latin typeface="+mn-lt"/>
-                    <a:ea typeface="+mn-ea"/>
-                    <a:cs typeface="+mn-cs"/>
-                  </a:rPr>
-                  <a:t>医学部</a:t>
-                </a:r>
-              </a:p>
-            </p:txBody>
-          </p:sp>
-          <p:sp>
-            <p:nvSpPr>
-              <p:cNvPr id="52" name="Rectangle 52"/>
+              <p:cNvPr id="44" name="Rectangle 44"/>
               <p:cNvSpPr/>
               <p:nvPr/>
             </p:nvSpPr>
             <p:spPr>
               <a:xfrm>
-                <a:off x="1619250" y="5353050"/>
-                <a:ext cx="152400" cy="114300"/>
+                <a:off x="6400800" y="2838450"/>
+                <a:ext cx="2400300" cy="266700"/>
               </a:xfrm>
               <a:prstGeom prst="roundRect">
                 <a:avLst>
-                  <a:gd name="adj" fmla="val 25000"/>
+                  <a:gd name="adj" fmla="val 28571"/>
+                </a:avLst>
+              </a:prstGeom>
+              <a:solidFill>
+                <a:schemeClr val="accent1"/>
+              </a:solidFill>
+              <a:ln>
+                <a:noFill/>
+              </a:ln>
+            </p:spPr>
+          </p:sp>
+          <p:sp>
+            <p:nvSpPr>
+              <p:cNvPr id="45" name="Rectangle 45"/>
+              <p:cNvSpPr/>
+              <p:nvPr/>
+            </p:nvSpPr>
+            <p:spPr>
+              <a:xfrm>
+                <a:off x="6400800" y="3448050"/>
+                <a:ext cx="4953000" cy="266700"/>
+              </a:xfrm>
+              <a:prstGeom prst="roundRect">
+                <a:avLst>
+                  <a:gd name="adj" fmla="val 28571"/>
                 </a:avLst>
               </a:prstGeom>
               <a:solidFill>
@@ -8903,58 +9165,18 @@
           </p:sp>
           <p:sp>
             <p:nvSpPr>
-              <p:cNvPr id="53" name="TextBox 53"/>
-              <p:cNvSpPr txBox="1"/>
-              <p:nvPr/>
-            </p:nvSpPr>
-            <p:spPr>
-              <a:xfrm>
-                <a:off x="1822704" y="5314950"/>
-                <a:ext cx="335280" cy="234696"/>
-              </a:xfrm>
-              <a:prstGeom prst="rect">
-                <a:avLst/>
-              </a:prstGeom>
-              <a:noFill/>
-              <a:ln>
-                <a:noFill/>
-              </a:ln>
-            </p:spPr>
-            <p:txBody>
-              <a:bodyPr wrap="none" lIns="0" tIns="0" rIns="0" bIns="0" anchor="t" anchorCtr="0">
-                <a:spAutoFit/>
-              </a:bodyPr>
-              <a:lstStyle/>
-              <a:p>
-                <a:pPr algn="l"/>
-                <a:r>
-                  <a:rPr lang="zh-CN" sz="1200" dirty="0">
-                    <a:solidFill>
-                      <a:schemeClr val="dk1"/>
-                    </a:solidFill>
-                    <a:latin typeface="+mn-lt"/>
-                    <a:ea typeface="+mn-ea"/>
-                    <a:cs typeface="+mn-cs"/>
-                  </a:rPr>
-                  <a:t>数统</a:t>
-                </a:r>
-              </a:p>
-            </p:txBody>
-          </p:sp>
-          <p:sp>
-            <p:nvSpPr>
-              <p:cNvPr id="54" name="Rectangle 54"/>
+              <p:cNvPr id="46" name="Rectangle 46"/>
               <p:cNvSpPr/>
               <p:nvPr/>
             </p:nvSpPr>
             <p:spPr>
               <a:xfrm>
-                <a:off x="2324100" y="5353050"/>
-                <a:ext cx="152400" cy="114300"/>
+                <a:off x="6400800" y="4057650"/>
+                <a:ext cx="4953000" cy="266700"/>
               </a:xfrm>
               <a:prstGeom prst="roundRect">
                 <a:avLst>
-                  <a:gd name="adj" fmla="val 25000"/>
+                  <a:gd name="adj" fmla="val 28571"/>
                 </a:avLst>
               </a:prstGeom>
               <a:solidFill>
@@ -8967,45 +9189,251 @@
           </p:sp>
           <p:sp>
             <p:nvSpPr>
-              <p:cNvPr id="55" name="TextBox 55"/>
-              <p:cNvSpPr txBox="1"/>
+              <p:cNvPr id="47" name="Rectangle 47"/>
+              <p:cNvSpPr/>
               <p:nvPr/>
             </p:nvSpPr>
             <p:spPr>
               <a:xfrm>
-                <a:off x="2527554" y="5314950"/>
-                <a:ext cx="199949" cy="234696"/>
+                <a:off x="8953500" y="4667250"/>
+                <a:ext cx="2400300" cy="266700"/>
               </a:xfrm>
-              <a:prstGeom prst="rect">
-                <a:avLst/>
+              <a:prstGeom prst="roundRect">
+                <a:avLst>
+                  <a:gd name="adj" fmla="val 28571"/>
+                </a:avLst>
               </a:prstGeom>
-              <a:noFill/>
+              <a:solidFill>
+                <a:schemeClr val="accent1"/>
+              </a:solidFill>
               <a:ln>
                 <a:noFill/>
               </a:ln>
             </p:spPr>
-            <p:txBody>
-              <a:bodyPr wrap="none" lIns="0" tIns="0" rIns="0" bIns="0" anchor="t" anchorCtr="0">
-                <a:spAutoFit/>
-              </a:bodyPr>
-              <a:lstStyle/>
-              <a:p>
-                <a:pPr algn="l"/>
-                <a:r>
-                  <a:rPr lang="en-US" sz="1200" dirty="0">
-                    <a:solidFill>
-                      <a:schemeClr val="dk1"/>
-                    </a:solidFill>
-                    <a:latin typeface="+mn-lt"/>
-                    <a:ea typeface="+mn-ea"/>
-                    <a:cs typeface="+mn-cs"/>
-                  </a:rPr>
-                  <a:t>PV</a:t>
-                </a:r>
-              </a:p>
-            </p:txBody>
           </p:sp>
         </p:grpSp>
+      </p:grpSp>
+      <p:grpSp>
+        <p:nvGrpSpPr>
+          <p:cNvPr id="56" name="plan-legend"/>
+          <p:cNvGrpSpPr/>
+          <p:nvPr/>
+        </p:nvGrpSpPr>
+        <p:grpSpPr>
+          <a:xfrm>
+            <a:off x="762000" y="5314950"/>
+            <a:ext cx="1965503" cy="234696"/>
+            <a:chOff x="762000" y="5314950"/>
+            <a:chExt cx="1965503" cy="234696"/>
+          </a:xfrm>
+        </p:grpSpPr>
+        <p:sp>
+          <p:nvSpPr>
+            <p:cNvPr id="50" name="Rectangle 50"/>
+            <p:cNvSpPr/>
+            <p:nvPr/>
+          </p:nvSpPr>
+          <p:spPr>
+            <a:xfrm>
+              <a:off x="762000" y="5353050"/>
+              <a:ext cx="152400" cy="114300"/>
+            </a:xfrm>
+            <a:prstGeom prst="roundRect">
+              <a:avLst>
+                <a:gd name="adj" fmla="val 25000"/>
+              </a:avLst>
+            </a:prstGeom>
+            <a:solidFill>
+              <a:schemeClr val="accent1"/>
+            </a:solidFill>
+            <a:ln>
+              <a:noFill/>
+            </a:ln>
+          </p:spPr>
+        </p:sp>
+        <p:sp>
+          <p:nvSpPr>
+            <p:cNvPr id="51" name="TextBox 51"/>
+            <p:cNvSpPr txBox="1"/>
+            <p:nvPr/>
+          </p:nvSpPr>
+          <p:spPr>
+            <a:xfrm>
+              <a:off x="965454" y="5314950"/>
+              <a:ext cx="496824" cy="234696"/>
+            </a:xfrm>
+            <a:prstGeom prst="rect">
+              <a:avLst/>
+            </a:prstGeom>
+            <a:noFill/>
+            <a:ln>
+              <a:noFill/>
+            </a:ln>
+          </p:spPr>
+          <p:txBody>
+            <a:bodyPr wrap="none" lIns="0" tIns="0" rIns="0" bIns="0" anchor="t" anchorCtr="0">
+              <a:spAutoFit/>
+            </a:bodyPr>
+            <a:lstStyle/>
+            <a:p>
+              <a:pPr algn="l"/>
+              <a:r>
+                <a:rPr lang="zh-CN" sz="1200" dirty="0">
+                  <a:solidFill>
+                    <a:schemeClr val="dk1"/>
+                  </a:solidFill>
+                  <a:latin typeface="+mn-lt"/>
+                  <a:ea typeface="+mn-ea"/>
+                  <a:cs typeface="+mn-cs"/>
+                </a:rPr>
+                <a:t>医学部</a:t>
+              </a:r>
+            </a:p>
+          </p:txBody>
+        </p:sp>
+        <p:sp>
+          <p:nvSpPr>
+            <p:cNvPr id="52" name="Rectangle 52"/>
+            <p:cNvSpPr/>
+            <p:nvPr/>
+          </p:nvSpPr>
+          <p:spPr>
+            <a:xfrm>
+              <a:off x="1619250" y="5353050"/>
+              <a:ext cx="152400" cy="114300"/>
+            </a:xfrm>
+            <a:prstGeom prst="roundRect">
+              <a:avLst>
+                <a:gd name="adj" fmla="val 25000"/>
+              </a:avLst>
+            </a:prstGeom>
+            <a:solidFill>
+              <a:srgbClr val="587B3B"/>
+            </a:solidFill>
+            <a:ln>
+              <a:noFill/>
+            </a:ln>
+          </p:spPr>
+        </p:sp>
+        <p:sp>
+          <p:nvSpPr>
+            <p:cNvPr id="53" name="TextBox 53"/>
+            <p:cNvSpPr txBox="1"/>
+            <p:nvPr/>
+          </p:nvSpPr>
+          <p:spPr>
+            <a:xfrm>
+              <a:off x="1822704" y="5314950"/>
+              <a:ext cx="335280" cy="234696"/>
+            </a:xfrm>
+            <a:prstGeom prst="rect">
+              <a:avLst/>
+            </a:prstGeom>
+            <a:noFill/>
+            <a:ln>
+              <a:noFill/>
+            </a:ln>
+          </p:spPr>
+          <p:txBody>
+            <a:bodyPr wrap="none" lIns="0" tIns="0" rIns="0" bIns="0" anchor="t" anchorCtr="0">
+              <a:spAutoFit/>
+            </a:bodyPr>
+            <a:lstStyle/>
+            <a:p>
+              <a:pPr algn="l"/>
+              <a:r>
+                <a:rPr lang="zh-CN" sz="1200" dirty="0">
+                  <a:solidFill>
+                    <a:schemeClr val="dk1"/>
+                  </a:solidFill>
+                  <a:latin typeface="+mn-lt"/>
+                  <a:ea typeface="+mn-ea"/>
+                  <a:cs typeface="+mn-cs"/>
+                </a:rPr>
+                <a:t>数统</a:t>
+              </a:r>
+            </a:p>
+          </p:txBody>
+        </p:sp>
+        <p:sp>
+          <p:nvSpPr>
+            <p:cNvPr id="54" name="Rectangle 54"/>
+            <p:cNvSpPr/>
+            <p:nvPr/>
+          </p:nvSpPr>
+          <p:spPr>
+            <a:xfrm>
+              <a:off x="2324100" y="5353050"/>
+              <a:ext cx="152400" cy="114300"/>
+            </a:xfrm>
+            <a:prstGeom prst="roundRect">
+              <a:avLst>
+                <a:gd name="adj" fmla="val 25000"/>
+              </a:avLst>
+            </a:prstGeom>
+            <a:solidFill>
+              <a:srgbClr val="A85F34"/>
+            </a:solidFill>
+            <a:ln>
+              <a:noFill/>
+            </a:ln>
+          </p:spPr>
+        </p:sp>
+        <p:sp>
+          <p:nvSpPr>
+            <p:cNvPr id="55" name="TextBox 55"/>
+            <p:cNvSpPr txBox="1"/>
+            <p:nvPr/>
+          </p:nvSpPr>
+          <p:spPr>
+            <a:xfrm>
+              <a:off x="2527554" y="5314950"/>
+              <a:ext cx="199949" cy="234696"/>
+            </a:xfrm>
+            <a:prstGeom prst="rect">
+              <a:avLst/>
+            </a:prstGeom>
+            <a:noFill/>
+            <a:ln>
+              <a:noFill/>
+            </a:ln>
+          </p:spPr>
+          <p:txBody>
+            <a:bodyPr wrap="none" lIns="0" tIns="0" rIns="0" bIns="0" anchor="t" anchorCtr="0">
+              <a:spAutoFit/>
+            </a:bodyPr>
+            <a:lstStyle/>
+            <a:p>
+              <a:pPr algn="l"/>
+              <a:r>
+                <a:rPr lang="en-US" sz="1200" dirty="0">
+                  <a:solidFill>
+                    <a:schemeClr val="dk1"/>
+                  </a:solidFill>
+                  <a:latin typeface="+mn-lt"/>
+                  <a:ea typeface="+mn-ea"/>
+                  <a:cs typeface="+mn-cs"/>
+                </a:rPr>
+                <a:t>PV</a:t>
+              </a:r>
+            </a:p>
+          </p:txBody>
+        </p:sp>
+      </p:grpSp>
+      <p:grpSp>
+        <p:nvGrpSpPr>
+          <p:cNvPr id="58" name="plan-takeaway"/>
+          <p:cNvGrpSpPr/>
+          <p:nvPr/>
+        </p:nvGrpSpPr>
+        <p:grpSpPr>
+          <a:xfrm>
+            <a:off x="754380" y="5727700"/>
+            <a:ext cx="8472221" cy="293370"/>
+            <a:chOff x="754380" y="5727700"/>
+            <a:chExt cx="8472221" cy="293370"/>
+          </a:xfrm>
+        </p:grpSpPr>
         <p:sp>
           <p:nvSpPr>
             <p:cNvPr id="57" name="TextBox 57"/>
@@ -9015,7 +9443,7 @@
           <p:spPr>
             <a:xfrm>
               <a:off x="754380" y="5727700"/>
-              <a:ext cx="5783123" cy="293370"/>
+              <a:ext cx="8472221" cy="293370"/>
             </a:xfrm>
             <a:prstGeom prst="rect">
               <a:avLst/>
@@ -9041,7 +9469,7 @@
                   <a:ea typeface="+mn-ea"/>
                   <a:cs typeface="+mn-cs"/>
                 </a:rPr>
-                <a:t>补收与版本确认</a:t>
+                <a:t>补收与版本差异确认</a:t>
               </a:r>
               <a:r>
                 <a:rPr lang="zh-CN" sz="1500" b="1" dirty="0">
@@ -9063,7 +9491,7 @@
                   <a:ea typeface="+mn-ea"/>
                   <a:cs typeface="+mn-cs"/>
                 </a:rPr>
-                <a:t>，复核与审阅意见在 2027Q2</a:t>
+                <a:t>，复核、安全性报告核对与审阅意见在 2027Q2 内完成</a:t>
               </a:r>
             </a:p>
           </p:txBody>
@@ -9196,7 +9624,7 @@
                             </p:stCondLst>
                             <p:childTnLst>
                               <p:par>
-                                <p:cTn xmlns:p="http://schemas.openxmlformats.org/presentationml/2006/main" id="5" presetID="22" presetClass="entr" presetSubtype="8" fill="hold" grpId="0" nodeType="withEffect" decel="70000">
+                                <p:cTn xmlns:p="http://schemas.openxmlformats.org/presentationml/2006/main" id="5" presetID="10" presetClass="entr" presetSubtype="0" fill="hold" grpId="0" nodeType="withEffect" decel="70000">
                                   <p:stCondLst>
                                     <p:cond delay="0"/>
                                   </p:stCondLst>
@@ -9204,6 +9632,138 @@
                                     <p:set>
                                       <p:cBhvr>
                                         <p:cTn id="6" dur="1" fill="hold">
+                                          <p:stCondLst>
+                                            <p:cond delay="0"/>
+                                          </p:stCondLst>
+                                        </p:cTn>
+                                        <p:tgtEl>
+                                          <p:spTgt spid="16"/>
+                                        </p:tgtEl>
+                                        <p:attrNameLst>
+                                          <p:attrName>style.visibility</p:attrName>
+                                        </p:attrNameLst>
+                                      </p:cBhvr>
+                                      <p:to>
+                                        <p:strVal val="visible"/>
+                                      </p:to>
+                                    </p:set>
+                                    <p:animEffect transition="in" filter="fade">
+                                      <p:cBhvr>
+                                        <p:cTn id="7" dur="520"/>
+                                        <p:tgtEl>
+                                          <p:spTgt spid="16"/>
+                                        </p:tgtEl>
+                                      </p:cBhvr>
+                                    </p:animEffect>
+                                  </p:childTnLst>
+                                </p:cTn>
+                              </p:par>
+                            </p:childTnLst>
+                          </p:cTn>
+                        </p:par>
+                        <p:par>
+                          <p:cTn id="8" fill="hold">
+                            <p:stCondLst>
+                              <p:cond delay="0"/>
+                            </p:stCondLst>
+                            <p:childTnLst>
+                              <p:par>
+                                <p:cTn xmlns:p="http://schemas.openxmlformats.org/presentationml/2006/main" id="9" presetID="22" presetClass="entr" presetSubtype="8" fill="hold" grpId="0" nodeType="withEffect" decel="70000">
+                                  <p:stCondLst>
+                                    <p:cond delay="70"/>
+                                  </p:stCondLst>
+                                  <p:childTnLst>
+                                    <p:set>
+                                      <p:cBhvr>
+                                        <p:cTn id="10" dur="1" fill="hold">
+                                          <p:stCondLst>
+                                            <p:cond delay="0"/>
+                                          </p:stCondLst>
+                                        </p:cTn>
+                                        <p:tgtEl>
+                                          <p:spTgt spid="49"/>
+                                        </p:tgtEl>
+                                        <p:attrNameLst>
+                                          <p:attrName>style.visibility</p:attrName>
+                                        </p:attrNameLst>
+                                      </p:cBhvr>
+                                      <p:to>
+                                        <p:strVal val="visible"/>
+                                      </p:to>
+                                    </p:set>
+                                    <p:animEffect transition="in" filter="wipe(left)">
+                                      <p:cBhvr>
+                                        <p:cTn id="11" dur="1000"/>
+                                        <p:tgtEl>
+                                          <p:spTgt spid="49"/>
+                                        </p:tgtEl>
+                                      </p:cBhvr>
+                                    </p:animEffect>
+                                  </p:childTnLst>
+                                </p:cTn>
+                              </p:par>
+                            </p:childTnLst>
+                          </p:cTn>
+                        </p:par>
+                        <p:par>
+                          <p:cTn id="12" fill="hold">
+                            <p:stCondLst>
+                              <p:cond delay="70"/>
+                            </p:stCondLst>
+                            <p:childTnLst>
+                              <p:par>
+                                <p:cTn xmlns:p="http://schemas.openxmlformats.org/presentationml/2006/main" id="13" presetID="10" presetClass="entr" presetSubtype="0" fill="hold" grpId="0" nodeType="withEffect" decel="70000">
+                                  <p:stCondLst>
+                                    <p:cond delay="140"/>
+                                  </p:stCondLst>
+                                  <p:childTnLst>
+                                    <p:set>
+                                      <p:cBhvr>
+                                        <p:cTn id="14" dur="1" fill="hold">
+                                          <p:stCondLst>
+                                            <p:cond delay="0"/>
+                                          </p:stCondLst>
+                                        </p:cTn>
+                                        <p:tgtEl>
+                                          <p:spTgt spid="56"/>
+                                        </p:tgtEl>
+                                        <p:attrNameLst>
+                                          <p:attrName>style.visibility</p:attrName>
+                                        </p:attrNameLst>
+                                      </p:cBhvr>
+                                      <p:to>
+                                        <p:strVal val="visible"/>
+                                      </p:to>
+                                    </p:set>
+                                    <p:animEffect transition="in" filter="fade">
+                                      <p:cBhvr>
+                                        <p:cTn id="15" dur="520"/>
+                                        <p:tgtEl>
+                                          <p:spTgt spid="56"/>
+                                        </p:tgtEl>
+                                      </p:cBhvr>
+                                    </p:animEffect>
+                                  </p:childTnLst>
+                                </p:cTn>
+                              </p:par>
+                            </p:childTnLst>
+                          </p:cTn>
+                        </p:par>
+                        <p:par>
+                          <p:cTn id="16" fill="hold">
+                            <p:stCondLst>
+                              <p:cond delay="210"/>
+                            </p:stCondLst>
+                            <p:childTnLst>
+                              <p:par>
+                                <p:cTn xmlns:p="http://schemas.openxmlformats.org/presentationml/2006/main" id="17" presetID="10" presetClass="entr" presetSubtype="0" fill="hold" grpId="0" nodeType="withEffect" decel="70000">
+                                  <p:stCondLst>
+                                    <p:cond delay="410"/>
+                                  </p:stCondLst>
+                                  <p:childTnLst>
+                                    <p:set>
+                                      <p:cBhvr>
+                                        <p:cTn id="18" dur="1" fill="hold">
                                           <p:stCondLst>
                                             <p:cond delay="0"/>
                                           </p:stCondLst>
@@ -9219,9 +9779,9 @@
                                         <p:strVal val="visible"/>
                                       </p:to>
                                     </p:set>
-                                    <p:animEffect transition="in" filter="wipe(left)">
+                                    <p:animEffect transition="in" filter="fade">
                                       <p:cBhvr>
-                                        <p:cTn id="7" dur="1000"/>
+                                        <p:cTn id="19" dur="520"/>
                                         <p:tgtEl>
                                           <p:spTgt spid="58"/>
                                         </p:tgtEl>
@@ -9409,9 +9969,9 @@
         <p:grpSpPr>
           <a:xfrm>
             <a:off x="865632" y="3167380"/>
-            <a:ext cx="6249848" cy="410718"/>
+            <a:ext cx="9029662" cy="410718"/>
             <a:chOff x="865632" y="3167380"/>
-            <a:chExt cx="6249848" cy="410718"/>
+            <a:chExt cx="9029662" cy="410718"/>
           </a:xfrm>
         </p:grpSpPr>
         <p:sp>
@@ -9459,7 +10019,7 @@
                   <a:ea typeface="+mn-ea"/>
                   <a:cs typeface="+mn-cs"/>
                 </a:rPr>
-                <a:t>4 份资料 2027Q1 内补收，2 项差异确认后再比较</a:t>
+                <a:t>4 份资料由医学部牵头，2027Q1 内补收；版本差异确认后再做组间比较</a:t>
               </a:r>
             </a:p>
           </p:txBody>
@@ -9538,6 +10098,180 @@
   <p:transition ns3:dur="400">
     <p:fade/>
   </p:transition>
+  <p:timing>
+    <p:tnLst>
+      <p:par>
+        <p:cTn id="1" dur="indefinite" restart="never" nodeType="tmRoot">
+          <p:childTnLst>
+            <p:seq concurrent="1" nextAc="seek">
+              <p:cTn id="2" dur="indefinite" nodeType="mainSeq">
+                <p:childTnLst>
+                  <p:par>
+                    <p:cTn id="3" fill="hold">
+                      <p:stCondLst>
+                        <p:cond delay="indefinite"/>
+                        <p:cond evt="onBegin" delay="0">
+                          <p:tn val="2"/>
+                        </p:cond>
+                      </p:stCondLst>
+                      <p:childTnLst>
+                        <p:par>
+                          <p:cTn id="4" fill="hold">
+                            <p:stCondLst>
+                              <p:cond delay="0"/>
+                            </p:stCondLst>
+                            <p:childTnLst>
+                              <p:par>
+                                <p:cTn id="5" presetID="10" presetClass="entr" presetSubtype="0" fill="hold" grpId="0" nodeType="withEffect" decel="70000">
+                                  <p:stCondLst>
+                                    <p:cond delay="0"/>
+                                  </p:stCondLst>
+                                  <p:childTnLst>
+                                    <p:set>
+                                      <p:cBhvr>
+                                        <p:cTn id="6" dur="1" fill="hold">
+                                          <p:stCondLst>
+                                            <p:cond delay="0"/>
+                                          </p:stCondLst>
+                                        </p:cTn>
+                                        <p:tgtEl>
+                                          <p:spTgt spid="5"/>
+                                        </p:tgtEl>
+                                        <p:attrNameLst>
+                                          <p:attrName>style.visibility</p:attrName>
+                                        </p:attrNameLst>
+                                      </p:cBhvr>
+                                      <p:to>
+                                        <p:strVal val="visible"/>
+                                      </p:to>
+                                    </p:set>
+                                    <p:animEffect transition="in" filter="fade">
+                                      <p:cBhvr>
+                                        <p:cTn id="7" dur="520"/>
+                                        <p:tgtEl>
+                                          <p:spTgt spid="5"/>
+                                        </p:tgtEl>
+                                      </p:cBhvr>
+                                    </p:animEffect>
+                                  </p:childTnLst>
+                                </p:cTn>
+                              </p:par>
+                            </p:childTnLst>
+                          </p:cTn>
+                        </p:par>
+                        <p:par>
+                          <p:cTn id="8" fill="hold">
+                            <p:stCondLst>
+                              <p:cond delay="0"/>
+                            </p:stCondLst>
+                            <p:childTnLst>
+                              <p:par>
+                                <p:cTn id="9" presetID="10" presetClass="entr" presetSubtype="0" fill="hold" grpId="0" nodeType="withEffect" decel="70000">
+                                  <p:stCondLst>
+                                    <p:cond delay="70"/>
+                                  </p:stCondLst>
+                                  <p:childTnLst>
+                                    <p:set>
+                                      <p:cBhvr>
+                                        <p:cTn id="10" dur="1" fill="hold">
+                                          <p:stCondLst>
+                                            <p:cond delay="0"/>
+                                          </p:stCondLst>
+                                        </p:cTn>
+                                        <p:tgtEl>
+                                          <p:spTgt spid="7"/>
+                                        </p:tgtEl>
+                                        <p:attrNameLst>
+                                          <p:attrName>style.visibility</p:attrName>
+                                        </p:attrNameLst>
+                                      </p:cBhvr>
+                                      <p:to>
+                                        <p:strVal val="visible"/>
+                                      </p:to>
+                                    </p:set>
+                                    <p:animEffect transition="in" filter="fade">
+                                      <p:cBhvr>
+                                        <p:cTn id="11" dur="520"/>
+                                        <p:tgtEl>
+                                          <p:spTgt spid="7"/>
+                                        </p:tgtEl>
+                                      </p:cBhvr>
+                                    </p:animEffect>
+                                  </p:childTnLst>
+                                </p:cTn>
+                              </p:par>
+                            </p:childTnLst>
+                          </p:cTn>
+                        </p:par>
+                        <p:par>
+                          <p:cTn id="12" fill="hold">
+                            <p:stCondLst>
+                              <p:cond delay="70"/>
+                            </p:stCondLst>
+                            <p:childTnLst>
+                              <p:par>
+                                <p:cTn id="13" presetID="10" presetClass="entr" presetSubtype="0" fill="hold" grpId="0" nodeType="withEffect" decel="70000">
+                                  <p:stCondLst>
+                                    <p:cond delay="140"/>
+                                  </p:stCondLst>
+                                  <p:childTnLst>
+                                    <p:set>
+                                      <p:cBhvr>
+                                        <p:cTn id="14" dur="1" fill="hold">
+                                          <p:stCondLst>
+                                            <p:cond delay="0"/>
+                                          </p:stCondLst>
+                                        </p:cTn>
+                                        <p:tgtEl>
+                                          <p:spTgt spid="9"/>
+                                        </p:tgtEl>
+                                        <p:attrNameLst>
+                                          <p:attrName>style.visibility</p:attrName>
+                                        </p:attrNameLst>
+                                      </p:cBhvr>
+                                      <p:to>
+                                        <p:strVal val="visible"/>
+                                      </p:to>
+                                    </p:set>
+                                    <p:animEffect transition="in" filter="fade">
+                                      <p:cBhvr>
+                                        <p:cTn id="15" dur="520"/>
+                                        <p:tgtEl>
+                                          <p:spTgt spid="9"/>
+                                        </p:tgtEl>
+                                      </p:cBhvr>
+                                    </p:animEffect>
+                                  </p:childTnLst>
+                                </p:cTn>
+                              </p:par>
+                            </p:childTnLst>
+                          </p:cTn>
+                        </p:par>
+                      </p:childTnLst>
+                    </p:cTn>
+                  </p:par>
+                </p:childTnLst>
+              </p:cTn>
+              <p:prevCondLst>
+                <p:cond evt="onPrev" delay="0">
+                  <p:tgtEl>
+                    <p:sldTgt/>
+                  </p:tgtEl>
+                </p:cond>
+              </p:prevCondLst>
+              <p:nextCondLst>
+                <p:cond evt="onNext" delay="0">
+                  <p:tgtEl>
+                    <p:sldTgt/>
+                  </p:tgtEl>
+                </p:cond>
+              </p:nextCondLst>
+            </p:seq>
+          </p:childTnLst>
+        </p:cTn>
+      </p:par>
+    </p:tnLst>
+  </p:timing>
 </p:sld>
 </file>
 

--- a/examples/reference/pptx-default/kangzhe_integrity_default.pptx
+++ b/examples/reference/pptx-default/kangzhe_integrity_default.pptx
@@ -1856,7 +1856,7 @@
                               <p:par>
                                 <p:cTn id="9" presetID="10" presetClass="entr" presetSubtype="0" fill="hold" grpId="0" nodeType="withEffect" decel="70000">
                                   <p:stCondLst>
-                                    <p:cond delay="70"/>
+                                    <p:cond delay="180"/>
                                   </p:stCondLst>
                                   <p:childTnLst>
                                     <p:set>
@@ -1894,13 +1894,13 @@
                         <p:par>
                           <p:cTn id="12" fill="hold">
                             <p:stCondLst>
-                              <p:cond delay="70"/>
+                              <p:cond delay="180"/>
                             </p:stCondLst>
                             <p:childTnLst>
                               <p:par>
                                 <p:cTn id="13" presetID="10" presetClass="entr" presetSubtype="0" fill="hold" grpId="0" nodeType="withEffect" decel="70000">
                                   <p:stCondLst>
-                                    <p:cond delay="140"/>
+                                    <p:cond delay="360"/>
                                   </p:stCondLst>
                                   <p:childTnLst>
                                     <p:set>
@@ -2983,7 +2983,7 @@
                               <p:par>
                                 <p:cTn id="9" presetID="10" presetClass="entr" presetSubtype="0" fill="hold" grpId="0" nodeType="withEffect" decel="70000">
                                   <p:stCondLst>
-                                    <p:cond delay="70"/>
+                                    <p:cond delay="180"/>
                                   </p:stCondLst>
                                   <p:childTnLst>
                                     <p:set>
@@ -3021,13 +3021,13 @@
                         <p:par>
                           <p:cTn id="12" fill="hold">
                             <p:stCondLst>
-                              <p:cond delay="70"/>
+                              <p:cond delay="180"/>
                             </p:stCondLst>
                             <p:childTnLst>
                               <p:par>
                                 <p:cTn id="13" presetID="10" presetClass="entr" presetSubtype="0" fill="hold" grpId="0" nodeType="withEffect" decel="70000">
                                   <p:stCondLst>
-                                    <p:cond delay="140"/>
+                                    <p:cond delay="360"/>
                                   </p:stCondLst>
                                   <p:childTnLst>
                                     <p:set>
@@ -5297,7 +5297,7 @@
                               <p:par>
                                 <p:cTn xmlns:p="http://schemas.openxmlformats.org/presentationml/2006/main" id="9" presetID="10" presetClass="entr" presetSubtype="0" fill="hold" grpId="0" nodeType="withEffect" decel="70000">
                                   <p:stCondLst>
-                                    <p:cond delay="70"/>
+                                    <p:cond delay="180"/>
                                   </p:stCondLst>
                                   <p:childTnLst>
                                     <p:set>
@@ -5335,13 +5335,13 @@
                         <p:par>
                           <p:cTn id="12" fill="hold">
                             <p:stCondLst>
-                              <p:cond delay="70"/>
+                              <p:cond delay="180"/>
                             </p:stCondLst>
                             <p:childTnLst>
                               <p:par>
                                 <p:cTn xmlns:p="http://schemas.openxmlformats.org/presentationml/2006/main" id="13" presetID="10" presetClass="entr" presetSubtype="0" fill="hold" grpId="0" nodeType="withEffect" decel="70000">
                                   <p:stCondLst>
-                                    <p:cond delay="140"/>
+                                    <p:cond delay="360"/>
                                   </p:stCondLst>
                                   <p:childTnLst>
                                     <p:set>
@@ -5379,13 +5379,13 @@
                         <p:par>
                           <p:cTn id="16" fill="hold">
                             <p:stCondLst>
-                              <p:cond delay="210"/>
+                              <p:cond delay="540"/>
                             </p:stCondLst>
                             <p:childTnLst>
                               <p:par>
                                 <p:cTn xmlns:p="http://schemas.openxmlformats.org/presentationml/2006/main" id="17" presetID="10" presetClass="entr" presetSubtype="0" fill="hold" grpId="0" nodeType="withEffect" decel="70000">
                                   <p:stCondLst>
-                                    <p:cond delay="410"/>
+                                    <p:cond delay="740"/>
                                   </p:stCondLst>
                                   <p:childTnLst>
                                     <p:set>
@@ -7278,7 +7278,7 @@
                               <p:par>
                                 <p:cTn xmlns:p="http://schemas.openxmlformats.org/presentationml/2006/main" id="9" presetID="22" presetClass="entr" presetSubtype="4" fill="hold" grpId="0" nodeType="withEffect" decel="70000">
                                   <p:stCondLst>
-                                    <p:cond delay="70"/>
+                                    <p:cond delay="180"/>
                                   </p:stCondLst>
                                   <p:childTnLst>
                                     <p:set>
@@ -7316,13 +7316,13 @@
                         <p:par>
                           <p:cTn id="12" fill="hold">
                             <p:stCondLst>
-                              <p:cond delay="70"/>
+                              <p:cond delay="180"/>
                             </p:stCondLst>
                             <p:childTnLst>
                               <p:par>
                                 <p:cTn xmlns:p="http://schemas.openxmlformats.org/presentationml/2006/main" id="13" presetID="10" presetClass="entr" presetSubtype="0" fill="hold" grpId="0" nodeType="withEffect" decel="70000">
                                   <p:stCondLst>
-                                    <p:cond delay="140"/>
+                                    <p:cond delay="360"/>
                                   </p:stCondLst>
                                   <p:childTnLst>
                                     <p:set>
@@ -7360,13 +7360,13 @@
                         <p:par>
                           <p:cTn id="16" fill="hold">
                             <p:stCondLst>
-                              <p:cond delay="210"/>
+                              <p:cond delay="540"/>
                             </p:stCondLst>
                             <p:childTnLst>
                               <p:par>
                                 <p:cTn xmlns:p="http://schemas.openxmlformats.org/presentationml/2006/main" id="17" presetID="10" presetClass="entr" presetSubtype="0" fill="hold" grpId="0" nodeType="withEffect" decel="70000">
                                   <p:stCondLst>
-                                    <p:cond delay="210"/>
+                                    <p:cond delay="540"/>
                                   </p:stCondLst>
                                   <p:childTnLst>
                                     <p:set>
@@ -7404,13 +7404,13 @@
                         <p:par>
                           <p:cTn id="20" fill="hold">
                             <p:stCondLst>
-                              <p:cond delay="420"/>
+                              <p:cond delay="1080"/>
                             </p:stCondLst>
                             <p:childTnLst>
                               <p:par>
                                 <p:cTn xmlns:p="http://schemas.openxmlformats.org/presentationml/2006/main" id="21" presetID="10" presetClass="entr" presetSubtype="0" fill="hold" grpId="0" nodeType="withEffect" decel="70000">
                                   <p:stCondLst>
-                                    <p:cond delay="410"/>
+                                    <p:cond delay="920"/>
                                   </p:stCondLst>
                                   <p:childTnLst>
                                     <p:set>
@@ -9670,7 +9670,7 @@
                               <p:par>
                                 <p:cTn xmlns:p="http://schemas.openxmlformats.org/presentationml/2006/main" id="9" presetID="22" presetClass="entr" presetSubtype="8" fill="hold" grpId="0" nodeType="withEffect" decel="70000">
                                   <p:stCondLst>
-                                    <p:cond delay="70"/>
+                                    <p:cond delay="180"/>
                                   </p:stCondLst>
                                   <p:childTnLst>
                                     <p:set>
@@ -9708,13 +9708,13 @@
                         <p:par>
                           <p:cTn id="12" fill="hold">
                             <p:stCondLst>
-                              <p:cond delay="70"/>
+                              <p:cond delay="180"/>
                             </p:stCondLst>
                             <p:childTnLst>
                               <p:par>
                                 <p:cTn xmlns:p="http://schemas.openxmlformats.org/presentationml/2006/main" id="13" presetID="10" presetClass="entr" presetSubtype="0" fill="hold" grpId="0" nodeType="withEffect" decel="70000">
                                   <p:stCondLst>
-                                    <p:cond delay="140"/>
+                                    <p:cond delay="360"/>
                                   </p:stCondLst>
                                   <p:childTnLst>
                                     <p:set>
@@ -9752,13 +9752,13 @@
                         <p:par>
                           <p:cTn id="16" fill="hold">
                             <p:stCondLst>
-                              <p:cond delay="210"/>
+                              <p:cond delay="540"/>
                             </p:stCondLst>
                             <p:childTnLst>
                               <p:par>
                                 <p:cTn xmlns:p="http://schemas.openxmlformats.org/presentationml/2006/main" id="17" presetID="10" presetClass="entr" presetSubtype="0" fill="hold" grpId="0" nodeType="withEffect" decel="70000">
                                   <p:stCondLst>
-                                    <p:cond delay="410"/>
+                                    <p:cond delay="740"/>
                                   </p:stCondLst>
                                   <p:childTnLst>
                                     <p:set>
@@ -10168,7 +10168,7 @@
                               <p:par>
                                 <p:cTn id="9" presetID="10" presetClass="entr" presetSubtype="0" fill="hold" grpId="0" nodeType="withEffect" decel="70000">
                                   <p:stCondLst>
-                                    <p:cond delay="70"/>
+                                    <p:cond delay="180"/>
                                   </p:stCondLst>
                                   <p:childTnLst>
                                     <p:set>
@@ -10206,13 +10206,13 @@
                         <p:par>
                           <p:cTn id="12" fill="hold">
                             <p:stCondLst>
-                              <p:cond delay="70"/>
+                              <p:cond delay="180"/>
                             </p:stCondLst>
                             <p:childTnLst>
                               <p:par>
                                 <p:cTn id="13" presetID="10" presetClass="entr" presetSubtype="0" fill="hold" grpId="0" nodeType="withEffect" decel="70000">
                                   <p:stCondLst>
-                                    <p:cond delay="140"/>
+                                    <p:cond delay="360"/>
                                   </p:stCondLst>
                                   <p:childTnLst>
                                     <p:set>

--- a/examples/reference/pptx-default/kangzhe_integrity_default.pptx
+++ b/examples/reference/pptx-default/kangzhe_integrity_default.pptx
@@ -671,10 +671,8 @@
           <a:bodyPr/>
           <a:lstStyle/>
           <a:p>
-            <a:pPr/>
             <a:r>
-              <a:rPr lang="zh-CN" dirty="0"/>
-              <a:t>今天用几分钟汇报一个研究资料包的完整性核对，数据是合成的。按计划应收 24 份，目前收到 20 份，还缺 4 份。希望会上把补收和确认的安排定下来。</a:t>
+              <a:t>今天汇报研究资料包的完整性核对，应收 24 份、已收 20 份，需要会上定下补收和确认的安排。</a:t>
             </a:r>
           </a:p>
         </p:txBody>
@@ -971,10 +969,8 @@
           <a:bodyPr/>
           <a:lstStyle/>
           <a:p>
-            <a:pPr/>
             <a:r>
-              <a:rPr lang="zh-CN" dirty="0"/>
-              <a:t>最后请大家确认两件事：一是缺的 4 份资料由医学部牵头，2027 年一季度内补收；二是 2 项版本差异确认之后，再做组间比较。没有不同意见的话，就按这个时间表推进。</a:t>
+              <a:t>请确认两件事：缺的 4 份由医学部牵头在 2027 年一季度内补收，2 项版本差异确认后再做组间比较。</a:t>
             </a:r>
           </a:p>
         </p:txBody>
